--- a/.lessons/23 Fundamental Blade Components/3 Passing Data To Components/1.pptx
+++ b/.lessons/23 Fundamental Blade Components/3 Passing Data To Components/1.pptx
@@ -8,6 +8,10 @@
     <p:sldId id="402" r:id="rId2"/>
     <p:sldId id="403" r:id="rId3"/>
     <p:sldId id="400" r:id="rId4"/>
+    <p:sldId id="404" r:id="rId5"/>
+    <p:sldId id="405" r:id="rId6"/>
+    <p:sldId id="406" r:id="rId7"/>
+    <p:sldId id="407" r:id="rId8"/>
   </p:sldIdLst>
   <p:sldSz cx="12192000" cy="6858000"/>
   <p:notesSz cx="6858000" cy="9144000"/>
@@ -261,7 +265,7 @@
           <a:p>
             <a:fld id="{3E102D2E-813C-461C-9963-687A650C48C0}" type="datetimeFigureOut">
               <a:rPr lang="en-US" smtClean="0"/>
-              <a:t>5/23/2025</a:t>
+              <a:t>5/25/2025</a:t>
             </a:fld>
             <a:endParaRPr lang="en-US"/>
           </a:p>
@@ -459,7 +463,7 @@
           <a:p>
             <a:fld id="{3E102D2E-813C-461C-9963-687A650C48C0}" type="datetimeFigureOut">
               <a:rPr lang="en-US" smtClean="0"/>
-              <a:t>5/23/2025</a:t>
+              <a:t>5/25/2025</a:t>
             </a:fld>
             <a:endParaRPr lang="en-US"/>
           </a:p>
@@ -667,7 +671,7 @@
           <a:p>
             <a:fld id="{3E102D2E-813C-461C-9963-687A650C48C0}" type="datetimeFigureOut">
               <a:rPr lang="en-US" smtClean="0"/>
-              <a:t>5/23/2025</a:t>
+              <a:t>5/25/2025</a:t>
             </a:fld>
             <a:endParaRPr lang="en-US"/>
           </a:p>
@@ -865,7 +869,7 @@
           <a:p>
             <a:fld id="{3E102D2E-813C-461C-9963-687A650C48C0}" type="datetimeFigureOut">
               <a:rPr lang="en-US" smtClean="0"/>
-              <a:t>5/23/2025</a:t>
+              <a:t>5/25/2025</a:t>
             </a:fld>
             <a:endParaRPr lang="en-US"/>
           </a:p>
@@ -1140,7 +1144,7 @@
           <a:p>
             <a:fld id="{3E102D2E-813C-461C-9963-687A650C48C0}" type="datetimeFigureOut">
               <a:rPr lang="en-US" smtClean="0"/>
-              <a:t>5/23/2025</a:t>
+              <a:t>5/25/2025</a:t>
             </a:fld>
             <a:endParaRPr lang="en-US"/>
           </a:p>
@@ -1405,7 +1409,7 @@
           <a:p>
             <a:fld id="{3E102D2E-813C-461C-9963-687A650C48C0}" type="datetimeFigureOut">
               <a:rPr lang="en-US" smtClean="0"/>
-              <a:t>5/23/2025</a:t>
+              <a:t>5/25/2025</a:t>
             </a:fld>
             <a:endParaRPr lang="en-US"/>
           </a:p>
@@ -1817,7 +1821,7 @@
           <a:p>
             <a:fld id="{3E102D2E-813C-461C-9963-687A650C48C0}" type="datetimeFigureOut">
               <a:rPr lang="en-US" smtClean="0"/>
-              <a:t>5/23/2025</a:t>
+              <a:t>5/25/2025</a:t>
             </a:fld>
             <a:endParaRPr lang="en-US"/>
           </a:p>
@@ -1958,7 +1962,7 @@
           <a:p>
             <a:fld id="{3E102D2E-813C-461C-9963-687A650C48C0}" type="datetimeFigureOut">
               <a:rPr lang="en-US" smtClean="0"/>
-              <a:t>5/23/2025</a:t>
+              <a:t>5/25/2025</a:t>
             </a:fld>
             <a:endParaRPr lang="en-US"/>
           </a:p>
@@ -2071,7 +2075,7 @@
           <a:p>
             <a:fld id="{3E102D2E-813C-461C-9963-687A650C48C0}" type="datetimeFigureOut">
               <a:rPr lang="en-US" smtClean="0"/>
-              <a:t>5/23/2025</a:t>
+              <a:t>5/25/2025</a:t>
             </a:fld>
             <a:endParaRPr lang="en-US"/>
           </a:p>
@@ -2382,7 +2386,7 @@
           <a:p>
             <a:fld id="{3E102D2E-813C-461C-9963-687A650C48C0}" type="datetimeFigureOut">
               <a:rPr lang="en-US" smtClean="0"/>
-              <a:t>5/23/2025</a:t>
+              <a:t>5/25/2025</a:t>
             </a:fld>
             <a:endParaRPr lang="en-US"/>
           </a:p>
@@ -2670,7 +2674,7 @@
           <a:p>
             <a:fld id="{3E102D2E-813C-461C-9963-687A650C48C0}" type="datetimeFigureOut">
               <a:rPr lang="en-US" smtClean="0"/>
-              <a:t>5/23/2025</a:t>
+              <a:t>5/25/2025</a:t>
             </a:fld>
             <a:endParaRPr lang="en-US"/>
           </a:p>
@@ -2911,7 +2915,7 @@
           <a:p>
             <a:fld id="{3E102D2E-813C-461C-9963-687A650C48C0}" type="datetimeFigureOut">
               <a:rPr lang="en-US" smtClean="0"/>
-              <a:t>5/23/2025</a:t>
+              <a:t>5/25/2025</a:t>
             </a:fld>
             <a:endParaRPr lang="en-US"/>
           </a:p>
@@ -3348,8 +3352,8 @@
         </p:nvSpPr>
         <p:spPr>
           <a:xfrm>
-            <a:off x="217714" y="255046"/>
-            <a:ext cx="11756571" cy="355354"/>
+            <a:off x="217714" y="127778"/>
+            <a:ext cx="11756571" cy="1330557"/>
           </a:xfrm>
           <a:prstGeom prst="rect">
             <a:avLst/>
@@ -3369,7 +3373,180 @@
               <a:buNone/>
             </a:pPr>
             <a:r>
-              <a:rPr kumimoji="0" lang="en-US" altLang="en-US" sz="1300" b="0" i="0" u="none" strike="noStrike" cap="none" normalizeH="0" baseline="0">
+              <a:rPr kumimoji="0" lang="az-Latn-AZ" altLang="en-US" sz="1100" b="0" i="0" u="none" strike="noStrike" cap="none" normalizeH="0" baseline="0">
+                <a:ln>
+                  <a:noFill/>
+                </a:ln>
+                <a:solidFill>
+                  <a:schemeClr val="tx1"/>
+                </a:solidFill>
+                <a:effectLst/>
+                <a:latin typeface="Arial" panose="020B0604020202020204" pitchFamily="34" charset="0"/>
+              </a:rPr>
+              <a:t>Bu dərs, </a:t>
+            </a:r>
+            <a:r>
+              <a:rPr kumimoji="0" lang="az-Latn-AZ" altLang="en-US" sz="1100" b="1" i="0" u="none" strike="noStrike" cap="none" normalizeH="0" baseline="0">
+                <a:ln>
+                  <a:noFill/>
+                </a:ln>
+                <a:solidFill>
+                  <a:schemeClr val="tx1"/>
+                </a:solidFill>
+                <a:effectLst/>
+                <a:latin typeface="Arial" panose="020B0604020202020204" pitchFamily="34" charset="0"/>
+              </a:rPr>
+              <a:t>datanın</a:t>
+            </a:r>
+            <a:r>
+              <a:rPr kumimoji="0" lang="az-Latn-AZ" altLang="en-US" sz="1100" b="0" i="0" u="none" strike="noStrike" cap="none" normalizeH="0" baseline="0">
+                <a:ln>
+                  <a:noFill/>
+                </a:ln>
+                <a:solidFill>
+                  <a:schemeClr val="tx1"/>
+                </a:solidFill>
+                <a:effectLst/>
+                <a:latin typeface="Arial" panose="020B0604020202020204" pitchFamily="34" charset="0"/>
+              </a:rPr>
+              <a:t> modeldən çağrılaraq </a:t>
+            </a:r>
+            <a:r>
+              <a:rPr kumimoji="0" lang="az-Latn-AZ" altLang="en-US" sz="1100" b="1" i="0" u="none" strike="noStrike" cap="none" normalizeH="0" baseline="0">
+                <a:ln>
+                  <a:noFill/>
+                </a:ln>
+                <a:solidFill>
+                  <a:schemeClr val="tx1"/>
+                </a:solidFill>
+                <a:effectLst/>
+                <a:latin typeface="Arial" panose="020B0604020202020204" pitchFamily="34" charset="0"/>
+              </a:rPr>
+              <a:t>component</a:t>
+            </a:r>
+            <a:r>
+              <a:rPr kumimoji="0" lang="az-Latn-AZ" altLang="en-US" sz="1100" b="0" i="0" u="none" strike="noStrike" cap="none" normalizeH="0" baseline="0">
+                <a:ln>
+                  <a:noFill/>
+                </a:ln>
+                <a:solidFill>
+                  <a:schemeClr val="tx1"/>
+                </a:solidFill>
+                <a:effectLst/>
+                <a:latin typeface="Arial" panose="020B0604020202020204" pitchFamily="34" charset="0"/>
+              </a:rPr>
+              <a:t> -ə necə göndəriləcəyini görəcəyik. Struktur aşağı şəkildəki kimi qurulmalıdır. Bu data ötürülmüsəni bəzi digər </a:t>
+            </a:r>
+            <a:r>
+              <a:rPr kumimoji="0" lang="en-US" altLang="en-US" sz="1100" b="0" i="0" u="none" strike="noStrike" cap="none" normalizeH="0" baseline="0">
+                <a:ln>
+                  <a:noFill/>
+                </a:ln>
+                <a:solidFill>
+                  <a:schemeClr val="tx1"/>
+                </a:solidFill>
+                <a:effectLst/>
+                <a:latin typeface="Arial" panose="020B0604020202020204" pitchFamily="34" charset="0"/>
+              </a:rPr>
+              <a:t>frameworklarda </a:t>
+            </a:r>
+            <a:r>
+              <a:rPr lang="en-US" altLang="en-US" sz="1100" b="1">
+                <a:latin typeface="Arial" panose="020B0604020202020204" pitchFamily="34" charset="0"/>
+              </a:rPr>
+              <a:t>props</a:t>
+            </a:r>
+            <a:r>
+              <a:rPr lang="en-US" altLang="en-US" sz="1100">
+                <a:latin typeface="Arial" panose="020B0604020202020204" pitchFamily="34" charset="0"/>
+              </a:rPr>
+              <a:t> </a:t>
+            </a:r>
+            <a:r>
+              <a:rPr lang="az-Latn-AZ" altLang="en-US" sz="1100">
+                <a:latin typeface="Arial" panose="020B0604020202020204" pitchFamily="34" charset="0"/>
+              </a:rPr>
+              <a:t>deyilir. Biz isə burada sadəcə </a:t>
+            </a:r>
+            <a:r>
+              <a:rPr lang="az-Latn-AZ" altLang="en-US" sz="1100" b="1">
+                <a:latin typeface="Arial" panose="020B0604020202020204" pitchFamily="34" charset="0"/>
+              </a:rPr>
+              <a:t>ötürülüməsi</a:t>
+            </a:r>
+            <a:r>
+              <a:rPr lang="az-Latn-AZ" altLang="en-US" sz="1100">
+                <a:latin typeface="Arial" panose="020B0604020202020204" pitchFamily="34" charset="0"/>
+              </a:rPr>
+              <a:t> ifadəsini işlədəcəyik.</a:t>
+            </a:r>
+          </a:p>
+          <a:p>
+            <a:pPr>
+              <a:lnSpc>
+                <a:spcPct val="150000"/>
+              </a:lnSpc>
+              <a:buNone/>
+            </a:pPr>
+            <a:endParaRPr kumimoji="0" lang="az-Latn-AZ" altLang="en-US" sz="1100" b="0" i="0" u="none" strike="noStrike" cap="none" normalizeH="0" baseline="0">
+              <a:ln>
+                <a:noFill/>
+              </a:ln>
+              <a:solidFill>
+                <a:schemeClr val="tx1"/>
+              </a:solidFill>
+              <a:effectLst/>
+              <a:latin typeface="Arial" panose="020B0604020202020204" pitchFamily="34" charset="0"/>
+            </a:endParaRPr>
+          </a:p>
+          <a:p>
+            <a:pPr>
+              <a:lnSpc>
+                <a:spcPct val="150000"/>
+              </a:lnSpc>
+              <a:buNone/>
+            </a:pPr>
+            <a:r>
+              <a:rPr kumimoji="0" lang="az-Latn-AZ" altLang="en-US" sz="1100" b="0" i="0" u="none" strike="noStrike" cap="none" normalizeH="0" baseline="0">
+                <a:ln>
+                  <a:noFill/>
+                </a:ln>
+                <a:solidFill>
+                  <a:schemeClr val="tx1"/>
+                </a:solidFill>
+                <a:effectLst/>
+                <a:latin typeface="Arial" panose="020B0604020202020204" pitchFamily="34" charset="0"/>
+              </a:rPr>
+              <a:t>Hal-hazırda ötürdüyümüz data bir </a:t>
+            </a:r>
+            <a:r>
+              <a:rPr kumimoji="0" lang="en-US" altLang="en-US" sz="1100" b="1" i="0" u="none" strike="noStrike" cap="none" normalizeH="0" baseline="0">
+                <a:ln>
+                  <a:noFill/>
+                </a:ln>
+                <a:solidFill>
+                  <a:schemeClr val="tx1"/>
+                </a:solidFill>
+                <a:effectLst/>
+                <a:latin typeface="Arial" panose="020B0604020202020204" pitchFamily="34" charset="0"/>
+              </a:rPr>
+              <a:t>OBJECT</a:t>
+            </a:r>
+            <a:r>
+              <a:rPr kumimoji="0" lang="en-US" altLang="en-US" sz="1100" b="0" i="0" u="none" strike="noStrike" cap="none" normalizeH="0" baseline="0">
+                <a:ln>
+                  <a:noFill/>
+                </a:ln>
+                <a:solidFill>
+                  <a:schemeClr val="tx1"/>
+                </a:solidFill>
+                <a:effectLst/>
+                <a:latin typeface="Arial" panose="020B0604020202020204" pitchFamily="34" charset="0"/>
+              </a:rPr>
+              <a:t> -dir</a:t>
+            </a:r>
+            <a:r>
+              <a:rPr kumimoji="0" lang="az-Latn-AZ" altLang="en-US" sz="1100" b="0" i="0" u="none" strike="noStrike" cap="none" normalizeH="0" baseline="0">
                 <a:ln>
                   <a:noFill/>
                 </a:ln>
@@ -3381,9 +3558,231 @@
               </a:rPr>
               <a:t>.</a:t>
             </a:r>
-          </a:p>
-        </p:txBody>
-      </p:sp>
+            <a:r>
+              <a:rPr kumimoji="0" lang="en-US" altLang="en-US" sz="1100" b="0" i="0" u="none" strike="noStrike" cap="none" normalizeH="0" baseline="0">
+                <a:ln>
+                  <a:noFill/>
+                </a:ln>
+                <a:solidFill>
+                  <a:schemeClr val="tx1"/>
+                </a:solidFill>
+                <a:effectLst/>
+                <a:latin typeface="Arial" panose="020B0604020202020204" pitchFamily="34" charset="0"/>
+              </a:rPr>
+              <a:t> </a:t>
+            </a:r>
+            <a:r>
+              <a:rPr kumimoji="0" lang="en-US" altLang="en-US" sz="1100" b="1" i="0" u="none" strike="noStrike" cap="none" normalizeH="0" baseline="0">
+                <a:ln>
+                  <a:noFill/>
+                </a:ln>
+                <a:solidFill>
+                  <a:schemeClr val="tx1"/>
+                </a:solidFill>
+                <a:effectLst/>
+                <a:latin typeface="Arial" panose="020B0604020202020204" pitchFamily="34" charset="0"/>
+              </a:rPr>
+              <a:t>__construct() </a:t>
+            </a:r>
+            <a:r>
+              <a:rPr kumimoji="0" lang="en-US" altLang="en-US" sz="1100" b="0" i="0" u="none" strike="noStrike" cap="none" normalizeH="0" baseline="0">
+                <a:ln>
+                  <a:noFill/>
+                </a:ln>
+                <a:solidFill>
+                  <a:schemeClr val="tx1"/>
+                </a:solidFill>
+                <a:effectLst/>
+                <a:latin typeface="Arial" panose="020B0604020202020204" pitchFamily="34" charset="0"/>
+              </a:rPr>
+              <a:t>metodunun </a:t>
+            </a:r>
+            <a:r>
+              <a:rPr kumimoji="0" lang="en-US" altLang="en-US" sz="1100" b="1" i="0" u="none" strike="noStrike" cap="none" normalizeH="0" baseline="0">
+                <a:ln>
+                  <a:noFill/>
+                </a:ln>
+                <a:solidFill>
+                  <a:schemeClr val="tx1"/>
+                </a:solidFill>
+                <a:effectLst/>
+                <a:latin typeface="Arial" panose="020B0604020202020204" pitchFamily="34" charset="0"/>
+              </a:rPr>
+              <a:t>parametri</a:t>
+            </a:r>
+            <a:r>
+              <a:rPr kumimoji="0" lang="en-US" altLang="en-US" sz="1100" b="0" i="0" u="none" strike="noStrike" cap="none" normalizeH="0" baseline="0">
+                <a:ln>
+                  <a:noFill/>
+                </a:ln>
+                <a:solidFill>
+                  <a:schemeClr val="tx1"/>
+                </a:solidFill>
+                <a:effectLst/>
+                <a:latin typeface="Arial" panose="020B0604020202020204" pitchFamily="34" charset="0"/>
+              </a:rPr>
+              <a:t> obyekti q</a:t>
+            </a:r>
+            <a:r>
+              <a:rPr kumimoji="0" lang="az-Latn-AZ" altLang="en-US" sz="1100" b="0" i="0" u="none" strike="noStrike" cap="none" normalizeH="0" baseline="0">
+                <a:ln>
+                  <a:noFill/>
+                </a:ln>
+                <a:solidFill>
+                  <a:schemeClr val="tx1"/>
+                </a:solidFill>
+                <a:effectLst/>
+                <a:latin typeface="Arial" panose="020B0604020202020204" pitchFamily="34" charset="0"/>
+              </a:rPr>
+              <a:t>əbul edir və ötürür </a:t>
+            </a:r>
+            <a:r>
+              <a:rPr kumimoji="0" lang="az-Latn-AZ" altLang="en-US" sz="1100" b="1" i="0" u="none" strike="noStrike" cap="none" normalizeH="0" baseline="0">
+                <a:ln>
+                  <a:noFill/>
+                </a:ln>
+                <a:solidFill>
+                  <a:schemeClr val="tx1"/>
+                </a:solidFill>
+                <a:effectLst/>
+                <a:latin typeface="Arial" panose="020B0604020202020204" pitchFamily="34" charset="0"/>
+              </a:rPr>
+              <a:t>variable</a:t>
+            </a:r>
+            <a:r>
+              <a:rPr kumimoji="0" lang="az-Latn-AZ" altLang="en-US" sz="1100" b="0" i="0" u="none" strike="noStrike" cap="none" normalizeH="0" baseline="0">
+                <a:ln>
+                  <a:noFill/>
+                </a:ln>
+                <a:solidFill>
+                  <a:schemeClr val="tx1"/>
+                </a:solidFill>
+                <a:effectLst/>
+                <a:latin typeface="Arial" panose="020B0604020202020204" pitchFamily="34" charset="0"/>
+              </a:rPr>
+              <a:t> -a. Həmin </a:t>
+            </a:r>
+            <a:r>
+              <a:rPr kumimoji="0" lang="az-Latn-AZ" altLang="en-US" sz="1100" b="1" i="0" u="none" strike="noStrike" cap="none" normalizeH="0" baseline="0">
+                <a:ln>
+                  <a:noFill/>
+                </a:ln>
+                <a:solidFill>
+                  <a:schemeClr val="tx1"/>
+                </a:solidFill>
+                <a:effectLst/>
+                <a:latin typeface="Arial" panose="020B0604020202020204" pitchFamily="34" charset="0"/>
+              </a:rPr>
+              <a:t>variable</a:t>
+            </a:r>
+            <a:r>
+              <a:rPr kumimoji="0" lang="az-Latn-AZ" altLang="en-US" sz="1100" b="0" i="0" u="none" strike="noStrike" cap="none" normalizeH="0" baseline="0">
+                <a:ln>
+                  <a:noFill/>
+                </a:ln>
+                <a:solidFill>
+                  <a:schemeClr val="tx1"/>
+                </a:solidFill>
+                <a:effectLst/>
+                <a:latin typeface="Arial" panose="020B0604020202020204" pitchFamily="34" charset="0"/>
+              </a:rPr>
+              <a:t> isə </a:t>
+            </a:r>
+            <a:r>
+              <a:rPr kumimoji="0" lang="az-Latn-AZ" altLang="en-US" sz="1100" b="1" i="0" u="none" strike="noStrike" cap="none" normalizeH="0" baseline="0">
+                <a:ln>
+                  <a:noFill/>
+                </a:ln>
+                <a:solidFill>
+                  <a:schemeClr val="tx1"/>
+                </a:solidFill>
+                <a:effectLst/>
+                <a:latin typeface="Arial" panose="020B0604020202020204" pitchFamily="34" charset="0"/>
+              </a:rPr>
+              <a:t>component</a:t>
+            </a:r>
+            <a:r>
+              <a:rPr kumimoji="0" lang="az-Latn-AZ" altLang="en-US" sz="1100" b="0" i="0" u="none" strike="noStrike" cap="none" normalizeH="0" baseline="0">
+                <a:ln>
+                  <a:noFill/>
+                </a:ln>
+                <a:solidFill>
+                  <a:schemeClr val="tx1"/>
+                </a:solidFill>
+                <a:effectLst/>
+                <a:latin typeface="Arial" panose="020B0604020202020204" pitchFamily="34" charset="0"/>
+              </a:rPr>
+              <a:t> daxilində </a:t>
+            </a:r>
+            <a:r>
+              <a:rPr kumimoji="0" lang="az-Latn-AZ" altLang="en-US" sz="1100" b="1" i="0" u="none" strike="noStrike" cap="none" normalizeH="0" baseline="0">
+                <a:ln>
+                  <a:noFill/>
+                </a:ln>
+                <a:solidFill>
+                  <a:schemeClr val="tx1"/>
+                </a:solidFill>
+                <a:effectLst/>
+                <a:latin typeface="Arial" panose="020B0604020202020204" pitchFamily="34" charset="0"/>
+              </a:rPr>
+              <a:t>avtomatik</a:t>
+            </a:r>
+            <a:r>
+              <a:rPr kumimoji="0" lang="az-Latn-AZ" altLang="en-US" sz="1100" b="0" i="0" u="none" strike="noStrike" cap="none" normalizeH="0" baseline="0">
+                <a:ln>
+                  <a:noFill/>
+                </a:ln>
+                <a:solidFill>
+                  <a:schemeClr val="tx1"/>
+                </a:solidFill>
+                <a:effectLst/>
+                <a:latin typeface="Arial" panose="020B0604020202020204" pitchFamily="34" charset="0"/>
+              </a:rPr>
+              <a:t> əl çatan olur. </a:t>
+            </a:r>
+            <a:endParaRPr kumimoji="0" lang="en-US" altLang="en-US" sz="1100" b="0" i="0" u="none" strike="noStrike" cap="none" normalizeH="0" baseline="0">
+              <a:ln>
+                <a:noFill/>
+              </a:ln>
+              <a:solidFill>
+                <a:schemeClr val="tx1"/>
+              </a:solidFill>
+              <a:effectLst/>
+              <a:latin typeface="Arial" panose="020B0604020202020204" pitchFamily="34" charset="0"/>
+            </a:endParaRPr>
+          </a:p>
+        </p:txBody>
+      </p:sp>
+      <p:pic>
+        <p:nvPicPr>
+          <p:cNvPr id="4" name="Picture 3">
+            <a:extLst>
+              <a:ext uri="{FF2B5EF4-FFF2-40B4-BE49-F238E27FC236}">
+                <a16:creationId xmlns:a16="http://schemas.microsoft.com/office/drawing/2014/main" id="{A6836C5A-D001-7D96-5929-46F16A663BE4}"/>
+              </a:ext>
+            </a:extLst>
+          </p:cNvPr>
+          <p:cNvPicPr>
+            <a:picLocks noChangeAspect="1"/>
+          </p:cNvPicPr>
+          <p:nvPr/>
+        </p:nvPicPr>
+        <p:blipFill>
+          <a:blip r:embed="rId2"/>
+          <a:stretch>
+            <a:fillRect/>
+          </a:stretch>
+        </p:blipFill>
+        <p:spPr>
+          <a:xfrm>
+            <a:off x="0" y="1477646"/>
+            <a:ext cx="12192000" cy="5380354"/>
+          </a:xfrm>
+          <a:prstGeom prst="rect">
+            <a:avLst/>
+          </a:prstGeom>
+        </p:spPr>
+      </p:pic>
     </p:spTree>
     <p:extLst>
       <p:ext uri="{BB962C8B-B14F-4D97-AF65-F5344CB8AC3E}">
@@ -3435,7 +3834,7 @@
         <p:spPr>
           <a:xfrm>
             <a:off x="217714" y="255046"/>
-            <a:ext cx="11756571" cy="355354"/>
+            <a:ext cx="11756571" cy="1255600"/>
           </a:xfrm>
           <a:prstGeom prst="rect">
             <a:avLst/>
@@ -3465,11 +3864,714 @@
                 <a:effectLst/>
                 <a:latin typeface="Arial" panose="020B0604020202020204" pitchFamily="34" charset="0"/>
               </a:rPr>
-              <a:t>.</a:t>
-            </a:r>
-          </a:p>
-        </p:txBody>
-      </p:sp>
+              <a:t>Gəlin </a:t>
+            </a:r>
+            <a:r>
+              <a:rPr kumimoji="0" lang="en-US" altLang="en-US" sz="1300" b="1" i="0" u="none" strike="noStrike" cap="none" normalizeH="0" baseline="0">
+                <a:ln>
+                  <a:noFill/>
+                </a:ln>
+                <a:solidFill>
+                  <a:srgbClr val="FF0000"/>
+                </a:solidFill>
+                <a:effectLst/>
+                <a:latin typeface="Arial" panose="020B0604020202020204" pitchFamily="34" charset="0"/>
+              </a:rPr>
+              <a:t>:attribute </a:t>
+            </a:r>
+            <a:r>
+              <a:rPr kumimoji="0" lang="en-US" altLang="en-US" sz="1300" b="0" i="0" u="none" strike="noStrike" cap="none" normalizeH="0" baseline="0">
+                <a:ln>
+                  <a:noFill/>
+                </a:ln>
+                <a:solidFill>
+                  <a:schemeClr val="tx1"/>
+                </a:solidFill>
+                <a:effectLst/>
+                <a:latin typeface="Arial" panose="020B0604020202020204" pitchFamily="34" charset="0"/>
+              </a:rPr>
+              <a:t>(cüt nöqtə ilə) və </a:t>
+            </a:r>
+            <a:r>
+              <a:rPr kumimoji="0" lang="en-US" altLang="en-US" sz="1300" b="1" i="0" u="none" strike="noStrike" cap="none" normalizeH="0" baseline="0">
+                <a:ln>
+                  <a:noFill/>
+                </a:ln>
+                <a:solidFill>
+                  <a:srgbClr val="FF0000"/>
+                </a:solidFill>
+                <a:effectLst/>
+                <a:latin typeface="Arial" panose="020B0604020202020204" pitchFamily="34" charset="0"/>
+              </a:rPr>
+              <a:t>attribute</a:t>
+            </a:r>
+            <a:r>
+              <a:rPr kumimoji="0" lang="en-US" altLang="en-US" sz="1300" b="0" i="0" u="none" strike="noStrike" cap="none" normalizeH="0" baseline="0">
+                <a:ln>
+                  <a:noFill/>
+                </a:ln>
+                <a:solidFill>
+                  <a:schemeClr val="tx1"/>
+                </a:solidFill>
+                <a:effectLst/>
+                <a:latin typeface="Arial" panose="020B0604020202020204" pitchFamily="34" charset="0"/>
+              </a:rPr>
+              <a:t> (cüt nöqtəsiz) yazılış formalarının fərqini texniki və praktiki olaraq izah edək.</a:t>
+            </a:r>
+            <a:endParaRPr kumimoji="0" lang="az-Latn-AZ" altLang="en-US" sz="1300" b="0" i="0" u="none" strike="noStrike" cap="none" normalizeH="0" baseline="0">
+              <a:ln>
+                <a:noFill/>
+              </a:ln>
+              <a:solidFill>
+                <a:schemeClr val="tx1"/>
+              </a:solidFill>
+              <a:effectLst/>
+              <a:latin typeface="Arial" panose="020B0604020202020204" pitchFamily="34" charset="0"/>
+            </a:endParaRPr>
+          </a:p>
+          <a:p>
+            <a:pPr>
+              <a:lnSpc>
+                <a:spcPct val="150000"/>
+              </a:lnSpc>
+              <a:buNone/>
+            </a:pPr>
+            <a:endParaRPr lang="az-Latn-AZ" altLang="en-US" sz="1300">
+              <a:latin typeface="Arial" panose="020B0604020202020204" pitchFamily="34" charset="0"/>
+            </a:endParaRPr>
+          </a:p>
+          <a:p>
+            <a:pPr>
+              <a:lnSpc>
+                <a:spcPct val="150000"/>
+              </a:lnSpc>
+              <a:buNone/>
+            </a:pPr>
+            <a:endParaRPr kumimoji="0" lang="az-Latn-AZ" altLang="en-US" sz="1300" b="0" i="0" u="none" strike="noStrike" cap="none" normalizeH="0" baseline="0">
+              <a:ln>
+                <a:noFill/>
+              </a:ln>
+              <a:solidFill>
+                <a:schemeClr val="tx1"/>
+              </a:solidFill>
+              <a:effectLst/>
+              <a:latin typeface="Arial" panose="020B0604020202020204" pitchFamily="34" charset="0"/>
+            </a:endParaRPr>
+          </a:p>
+          <a:p>
+            <a:pPr>
+              <a:lnSpc>
+                <a:spcPct val="150000"/>
+              </a:lnSpc>
+              <a:buNone/>
+            </a:pPr>
+            <a:r>
+              <a:rPr kumimoji="0" lang="en-US" altLang="en-US" sz="1300" b="1" i="0" u="none" strike="noStrike" cap="none" normalizeH="0" baseline="0">
+                <a:ln>
+                  <a:noFill/>
+                </a:ln>
+                <a:solidFill>
+                  <a:schemeClr val="tx1"/>
+                </a:solidFill>
+                <a:effectLst/>
+                <a:latin typeface="Arial" panose="020B0604020202020204" pitchFamily="34" charset="0"/>
+              </a:rPr>
+              <a:t>Qısaca Fərq</a:t>
+            </a:r>
+            <a:r>
+              <a:rPr kumimoji="0" lang="en-US" altLang="en-US" sz="1300" b="0" i="0" u="none" strike="noStrike" cap="none" normalizeH="0" baseline="0">
+                <a:ln>
+                  <a:noFill/>
+                </a:ln>
+                <a:solidFill>
+                  <a:schemeClr val="tx1"/>
+                </a:solidFill>
+                <a:effectLst/>
+                <a:latin typeface="Arial" panose="020B0604020202020204" pitchFamily="34" charset="0"/>
+              </a:rPr>
+              <a:t>:</a:t>
+            </a:r>
+          </a:p>
+        </p:txBody>
+      </p:sp>
+      <p:graphicFrame>
+        <p:nvGraphicFramePr>
+          <p:cNvPr id="2" name="Table 1">
+            <a:extLst>
+              <a:ext uri="{FF2B5EF4-FFF2-40B4-BE49-F238E27FC236}">
+                <a16:creationId xmlns:a16="http://schemas.microsoft.com/office/drawing/2014/main" id="{4E242DFD-792A-5FB0-CD9B-8FB0A57EEE4B}"/>
+              </a:ext>
+            </a:extLst>
+          </p:cNvPr>
+          <p:cNvGraphicFramePr>
+            <a:graphicFrameLocks noGrp="1"/>
+          </p:cNvGraphicFramePr>
+          <p:nvPr>
+            <p:extLst>
+              <p:ext uri="{D42A27DB-BD31-4B8C-83A1-F6EECF244321}">
+                <p14:modId xmlns:p14="http://schemas.microsoft.com/office/powerpoint/2010/main" val="1529994679"/>
+              </p:ext>
+            </p:extLst>
+          </p:nvPr>
+        </p:nvGraphicFramePr>
+        <p:xfrm>
+          <a:off x="217714" y="1852489"/>
+          <a:ext cx="11756571" cy="2581444"/>
+        </p:xfrm>
+        <a:graphic>
+          <a:graphicData uri="http://schemas.openxmlformats.org/drawingml/2006/table">
+            <a:tbl>
+              <a:tblPr/>
+              <a:tblGrid>
+                <a:gridCol w="3628422">
+                  <a:extLst>
+                    <a:ext uri="{9D8B030D-6E8A-4147-A177-3AD203B41FA5}">
+                      <a16:colId xmlns:a16="http://schemas.microsoft.com/office/drawing/2014/main" val="978043971"/>
+                    </a:ext>
+                  </a:extLst>
+                </a:gridCol>
+                <a:gridCol w="4209292">
+                  <a:extLst>
+                    <a:ext uri="{9D8B030D-6E8A-4147-A177-3AD203B41FA5}">
+                      <a16:colId xmlns:a16="http://schemas.microsoft.com/office/drawing/2014/main" val="1385587546"/>
+                    </a:ext>
+                  </a:extLst>
+                </a:gridCol>
+                <a:gridCol w="3918857">
+                  <a:extLst>
+                    <a:ext uri="{9D8B030D-6E8A-4147-A177-3AD203B41FA5}">
+                      <a16:colId xmlns:a16="http://schemas.microsoft.com/office/drawing/2014/main" val="806196486"/>
+                    </a:ext>
+                  </a:extLst>
+                </a:gridCol>
+              </a:tblGrid>
+              <a:tr h="573654">
+                <a:tc>
+                  <a:txBody>
+                    <a:bodyPr/>
+                    <a:lstStyle/>
+                    <a:p>
+                      <a:r>
+                        <a:rPr lang="en-US" sz="1600" b="1"/>
+                        <a:t>Yazılış</a:t>
+                      </a:r>
+                    </a:p>
+                  </a:txBody>
+                  <a:tcPr anchor="ctr">
+                    <a:lnL w="12700" cap="flat" cmpd="sng" algn="ctr">
+                      <a:solidFill>
+                        <a:schemeClr val="tx1"/>
+                      </a:solidFill>
+                      <a:prstDash val="solid"/>
+                      <a:round/>
+                      <a:headEnd type="none" w="med" len="med"/>
+                      <a:tailEnd type="none" w="med" len="med"/>
+                    </a:lnL>
+                    <a:lnR w="12700" cap="flat" cmpd="sng" algn="ctr">
+                      <a:solidFill>
+                        <a:schemeClr val="tx1"/>
+                      </a:solidFill>
+                      <a:prstDash val="solid"/>
+                      <a:round/>
+                      <a:headEnd type="none" w="med" len="med"/>
+                      <a:tailEnd type="none" w="med" len="med"/>
+                    </a:lnR>
+                    <a:lnT w="12700" cap="flat" cmpd="sng" algn="ctr">
+                      <a:solidFill>
+                        <a:schemeClr val="tx1"/>
+                      </a:solidFill>
+                      <a:prstDash val="solid"/>
+                      <a:round/>
+                      <a:headEnd type="none" w="med" len="med"/>
+                      <a:tailEnd type="none" w="med" len="med"/>
+                    </a:lnT>
+                    <a:lnB w="12700" cap="flat" cmpd="sng" algn="ctr">
+                      <a:solidFill>
+                        <a:schemeClr val="tx1"/>
+                      </a:solidFill>
+                      <a:prstDash val="solid"/>
+                      <a:round/>
+                      <a:headEnd type="none" w="med" len="med"/>
+                      <a:tailEnd type="none" w="med" len="med"/>
+                    </a:lnB>
+                    <a:solidFill>
+                      <a:schemeClr val="accent2"/>
+                    </a:solidFill>
+                  </a:tcPr>
+                </a:tc>
+                <a:tc>
+                  <a:txBody>
+                    <a:bodyPr/>
+                    <a:lstStyle/>
+                    <a:p>
+                      <a:r>
+                        <a:rPr lang="en-US" sz="1600" b="1"/>
+                        <a:t>Məzmunun Tipi</a:t>
+                      </a:r>
+                    </a:p>
+                  </a:txBody>
+                  <a:tcPr anchor="ctr">
+                    <a:lnL w="12700" cap="flat" cmpd="sng" algn="ctr">
+                      <a:solidFill>
+                        <a:schemeClr val="tx1"/>
+                      </a:solidFill>
+                      <a:prstDash val="solid"/>
+                      <a:round/>
+                      <a:headEnd type="none" w="med" len="med"/>
+                      <a:tailEnd type="none" w="med" len="med"/>
+                    </a:lnL>
+                    <a:lnR w="12700" cap="flat" cmpd="sng" algn="ctr">
+                      <a:solidFill>
+                        <a:schemeClr val="tx1"/>
+                      </a:solidFill>
+                      <a:prstDash val="solid"/>
+                      <a:round/>
+                      <a:headEnd type="none" w="med" len="med"/>
+                      <a:tailEnd type="none" w="med" len="med"/>
+                    </a:lnR>
+                    <a:lnT w="12700" cap="flat" cmpd="sng" algn="ctr">
+                      <a:solidFill>
+                        <a:schemeClr val="tx1"/>
+                      </a:solidFill>
+                      <a:prstDash val="solid"/>
+                      <a:round/>
+                      <a:headEnd type="none" w="med" len="med"/>
+                      <a:tailEnd type="none" w="med" len="med"/>
+                    </a:lnT>
+                    <a:lnB w="12700" cap="flat" cmpd="sng" algn="ctr">
+                      <a:solidFill>
+                        <a:schemeClr val="tx1"/>
+                      </a:solidFill>
+                      <a:prstDash val="solid"/>
+                      <a:round/>
+                      <a:headEnd type="none" w="med" len="med"/>
+                      <a:tailEnd type="none" w="med" len="med"/>
+                    </a:lnB>
+                    <a:solidFill>
+                      <a:schemeClr val="accent2"/>
+                    </a:solidFill>
+                  </a:tcPr>
+                </a:tc>
+                <a:tc>
+                  <a:txBody>
+                    <a:bodyPr/>
+                    <a:lstStyle/>
+                    <a:p>
+                      <a:r>
+                        <a:rPr lang="en-US" sz="1600" b="1"/>
+                        <a:t>Təhlil</a:t>
+                      </a:r>
+                    </a:p>
+                  </a:txBody>
+                  <a:tcPr anchor="ctr">
+                    <a:lnL w="12700" cap="flat" cmpd="sng" algn="ctr">
+                      <a:solidFill>
+                        <a:schemeClr val="tx1"/>
+                      </a:solidFill>
+                      <a:prstDash val="solid"/>
+                      <a:round/>
+                      <a:headEnd type="none" w="med" len="med"/>
+                      <a:tailEnd type="none" w="med" len="med"/>
+                    </a:lnL>
+                    <a:lnR w="12700" cap="flat" cmpd="sng" algn="ctr">
+                      <a:solidFill>
+                        <a:schemeClr val="tx1"/>
+                      </a:solidFill>
+                      <a:prstDash val="solid"/>
+                      <a:round/>
+                      <a:headEnd type="none" w="med" len="med"/>
+                      <a:tailEnd type="none" w="med" len="med"/>
+                    </a:lnR>
+                    <a:lnT w="12700" cap="flat" cmpd="sng" algn="ctr">
+                      <a:solidFill>
+                        <a:schemeClr val="tx1"/>
+                      </a:solidFill>
+                      <a:prstDash val="solid"/>
+                      <a:round/>
+                      <a:headEnd type="none" w="med" len="med"/>
+                      <a:tailEnd type="none" w="med" len="med"/>
+                    </a:lnT>
+                    <a:lnB w="12700" cap="flat" cmpd="sng" algn="ctr">
+                      <a:solidFill>
+                        <a:schemeClr val="tx1"/>
+                      </a:solidFill>
+                      <a:prstDash val="solid"/>
+                      <a:round/>
+                      <a:headEnd type="none" w="med" len="med"/>
+                      <a:tailEnd type="none" w="med" len="med"/>
+                    </a:lnB>
+                    <a:solidFill>
+                      <a:schemeClr val="accent2"/>
+                    </a:solidFill>
+                  </a:tcPr>
+                </a:tc>
+                <a:extLst>
+                  <a:ext uri="{0D108BD9-81ED-4DB2-BD59-A6C34878D82A}">
+                    <a16:rowId xmlns:a16="http://schemas.microsoft.com/office/drawing/2014/main" val="418472110"/>
+                  </a:ext>
+                </a:extLst>
+              </a:tr>
+              <a:tr h="1003895">
+                <a:tc>
+                  <a:txBody>
+                    <a:bodyPr/>
+                    <a:lstStyle/>
+                    <a:p>
+                      <a:r>
+                        <a:rPr lang="en-US" sz="1600"/>
+                        <a:t>:post="$post"</a:t>
+                      </a:r>
+                    </a:p>
+                  </a:txBody>
+                  <a:tcPr anchor="ctr">
+                    <a:lnL w="12700" cap="flat" cmpd="sng" algn="ctr">
+                      <a:solidFill>
+                        <a:schemeClr val="tx1"/>
+                      </a:solidFill>
+                      <a:prstDash val="solid"/>
+                      <a:round/>
+                      <a:headEnd type="none" w="med" len="med"/>
+                      <a:tailEnd type="none" w="med" len="med"/>
+                    </a:lnL>
+                    <a:lnR w="12700" cap="flat" cmpd="sng" algn="ctr">
+                      <a:solidFill>
+                        <a:schemeClr val="tx1"/>
+                      </a:solidFill>
+                      <a:prstDash val="solid"/>
+                      <a:round/>
+                      <a:headEnd type="none" w="med" len="med"/>
+                      <a:tailEnd type="none" w="med" len="med"/>
+                    </a:lnR>
+                    <a:lnT w="12700" cap="flat" cmpd="sng" algn="ctr">
+                      <a:solidFill>
+                        <a:schemeClr val="tx1"/>
+                      </a:solidFill>
+                      <a:prstDash val="solid"/>
+                      <a:round/>
+                      <a:headEnd type="none" w="med" len="med"/>
+                      <a:tailEnd type="none" w="med" len="med"/>
+                    </a:lnT>
+                    <a:lnB w="12700" cap="flat" cmpd="sng" algn="ctr">
+                      <a:solidFill>
+                        <a:schemeClr val="tx1"/>
+                      </a:solidFill>
+                      <a:prstDash val="solid"/>
+                      <a:round/>
+                      <a:headEnd type="none" w="med" len="med"/>
+                      <a:tailEnd type="none" w="med" len="med"/>
+                    </a:lnB>
+                    <a:noFill/>
+                  </a:tcPr>
+                </a:tc>
+                <a:tc>
+                  <a:txBody>
+                    <a:bodyPr/>
+                    <a:lstStyle/>
+                    <a:p>
+                      <a:r>
+                        <a:rPr lang="en-US" sz="1600" b="1"/>
+                        <a:t>PHP ifadəsi</a:t>
+                      </a:r>
+                      <a:r>
+                        <a:rPr lang="en-US" sz="1600"/>
+                        <a:t> (dəyişən, obyekt, funksiya və s.)</a:t>
+                      </a:r>
+                    </a:p>
+                  </a:txBody>
+                  <a:tcPr anchor="ctr">
+                    <a:lnL w="12700" cap="flat" cmpd="sng" algn="ctr">
+                      <a:solidFill>
+                        <a:schemeClr val="tx1"/>
+                      </a:solidFill>
+                      <a:prstDash val="solid"/>
+                      <a:round/>
+                      <a:headEnd type="none" w="med" len="med"/>
+                      <a:tailEnd type="none" w="med" len="med"/>
+                    </a:lnL>
+                    <a:lnR w="12700" cap="flat" cmpd="sng" algn="ctr">
+                      <a:solidFill>
+                        <a:schemeClr val="tx1"/>
+                      </a:solidFill>
+                      <a:prstDash val="solid"/>
+                      <a:round/>
+                      <a:headEnd type="none" w="med" len="med"/>
+                      <a:tailEnd type="none" w="med" len="med"/>
+                    </a:lnR>
+                    <a:lnT w="12700" cap="flat" cmpd="sng" algn="ctr">
+                      <a:solidFill>
+                        <a:schemeClr val="tx1"/>
+                      </a:solidFill>
+                      <a:prstDash val="solid"/>
+                      <a:round/>
+                      <a:headEnd type="none" w="med" len="med"/>
+                      <a:tailEnd type="none" w="med" len="med"/>
+                    </a:lnT>
+                    <a:lnB w="12700" cap="flat" cmpd="sng" algn="ctr">
+                      <a:solidFill>
+                        <a:schemeClr val="tx1"/>
+                      </a:solidFill>
+                      <a:prstDash val="solid"/>
+                      <a:round/>
+                      <a:headEnd type="none" w="med" len="med"/>
+                      <a:tailEnd type="none" w="med" len="med"/>
+                    </a:lnB>
+                    <a:noFill/>
+                  </a:tcPr>
+                </a:tc>
+                <a:tc>
+                  <a:txBody>
+                    <a:bodyPr/>
+                    <a:lstStyle/>
+                    <a:p>
+                      <a:r>
+                        <a:rPr lang="en-US" sz="1600"/>
+                        <a:t>Dəyişən və ya</a:t>
+                      </a:r>
+                      <a:r>
+                        <a:rPr lang="az-Latn-AZ" sz="1600"/>
+                        <a:t> php</a:t>
+                      </a:r>
+                      <a:r>
+                        <a:rPr lang="en-US" sz="1600"/>
+                        <a:t> </a:t>
+                      </a:r>
+                      <a:r>
+                        <a:rPr lang="az-Latn-AZ" sz="1600"/>
+                        <a:t>kodusi</a:t>
+                      </a:r>
+                      <a:r>
+                        <a:rPr lang="en-US" sz="1600"/>
+                        <a:t> ötürülür</a:t>
+                      </a:r>
+                    </a:p>
+                  </a:txBody>
+                  <a:tcPr anchor="ctr">
+                    <a:lnL w="12700" cap="flat" cmpd="sng" algn="ctr">
+                      <a:solidFill>
+                        <a:schemeClr val="tx1"/>
+                      </a:solidFill>
+                      <a:prstDash val="solid"/>
+                      <a:round/>
+                      <a:headEnd type="none" w="med" len="med"/>
+                      <a:tailEnd type="none" w="med" len="med"/>
+                    </a:lnL>
+                    <a:lnR w="12700" cap="flat" cmpd="sng" algn="ctr">
+                      <a:solidFill>
+                        <a:schemeClr val="tx1"/>
+                      </a:solidFill>
+                      <a:prstDash val="solid"/>
+                      <a:round/>
+                      <a:headEnd type="none" w="med" len="med"/>
+                      <a:tailEnd type="none" w="med" len="med"/>
+                    </a:lnR>
+                    <a:lnT w="12700" cap="flat" cmpd="sng" algn="ctr">
+                      <a:solidFill>
+                        <a:schemeClr val="tx1"/>
+                      </a:solidFill>
+                      <a:prstDash val="solid"/>
+                      <a:round/>
+                      <a:headEnd type="none" w="med" len="med"/>
+                      <a:tailEnd type="none" w="med" len="med"/>
+                    </a:lnT>
+                    <a:lnB w="12700" cap="flat" cmpd="sng" algn="ctr">
+                      <a:solidFill>
+                        <a:schemeClr val="tx1"/>
+                      </a:solidFill>
+                      <a:prstDash val="solid"/>
+                      <a:round/>
+                      <a:headEnd type="none" w="med" len="med"/>
+                      <a:tailEnd type="none" w="med" len="med"/>
+                    </a:lnB>
+                    <a:noFill/>
+                  </a:tcPr>
+                </a:tc>
+                <a:extLst>
+                  <a:ext uri="{0D108BD9-81ED-4DB2-BD59-A6C34878D82A}">
+                    <a16:rowId xmlns:a16="http://schemas.microsoft.com/office/drawing/2014/main" val="3151096706"/>
+                  </a:ext>
+                </a:extLst>
+              </a:tr>
+              <a:tr h="1003895">
+                <a:tc>
+                  <a:txBody>
+                    <a:bodyPr/>
+                    <a:lstStyle/>
+                    <a:p>
+                      <a:r>
+                        <a:rPr lang="en-US" sz="1600"/>
+                        <a:t>post="Burada hər hansısa bir mətn"</a:t>
+                      </a:r>
+                    </a:p>
+                  </a:txBody>
+                  <a:tcPr anchor="ctr">
+                    <a:lnL w="12700" cap="flat" cmpd="sng" algn="ctr">
+                      <a:solidFill>
+                        <a:schemeClr val="tx1"/>
+                      </a:solidFill>
+                      <a:prstDash val="solid"/>
+                      <a:round/>
+                      <a:headEnd type="none" w="med" len="med"/>
+                      <a:tailEnd type="none" w="med" len="med"/>
+                    </a:lnL>
+                    <a:lnR w="12700" cap="flat" cmpd="sng" algn="ctr">
+                      <a:solidFill>
+                        <a:schemeClr val="tx1"/>
+                      </a:solidFill>
+                      <a:prstDash val="solid"/>
+                      <a:round/>
+                      <a:headEnd type="none" w="med" len="med"/>
+                      <a:tailEnd type="none" w="med" len="med"/>
+                    </a:lnR>
+                    <a:lnT w="12700" cap="flat" cmpd="sng" algn="ctr">
+                      <a:solidFill>
+                        <a:schemeClr val="tx1"/>
+                      </a:solidFill>
+                      <a:prstDash val="solid"/>
+                      <a:round/>
+                      <a:headEnd type="none" w="med" len="med"/>
+                      <a:tailEnd type="none" w="med" len="med"/>
+                    </a:lnT>
+                    <a:lnB w="12700" cap="flat" cmpd="sng" algn="ctr">
+                      <a:solidFill>
+                        <a:schemeClr val="tx1"/>
+                      </a:solidFill>
+                      <a:prstDash val="solid"/>
+                      <a:round/>
+                      <a:headEnd type="none" w="med" len="med"/>
+                      <a:tailEnd type="none" w="med" len="med"/>
+                    </a:lnB>
+                    <a:noFill/>
+                  </a:tcPr>
+                </a:tc>
+                <a:tc>
+                  <a:txBody>
+                    <a:bodyPr/>
+                    <a:lstStyle/>
+                    <a:p>
+                      <a:r>
+                        <a:rPr lang="en-US" sz="1600" b="1"/>
+                        <a:t>Statik string (mətin)</a:t>
+                      </a:r>
+                      <a:endParaRPr lang="en-US" sz="1600"/>
+                    </a:p>
+                  </a:txBody>
+                  <a:tcPr anchor="ctr">
+                    <a:lnL w="12700" cap="flat" cmpd="sng" algn="ctr">
+                      <a:solidFill>
+                        <a:schemeClr val="tx1"/>
+                      </a:solidFill>
+                      <a:prstDash val="solid"/>
+                      <a:round/>
+                      <a:headEnd type="none" w="med" len="med"/>
+                      <a:tailEnd type="none" w="med" len="med"/>
+                    </a:lnL>
+                    <a:lnR w="12700" cap="flat" cmpd="sng" algn="ctr">
+                      <a:solidFill>
+                        <a:schemeClr val="tx1"/>
+                      </a:solidFill>
+                      <a:prstDash val="solid"/>
+                      <a:round/>
+                      <a:headEnd type="none" w="med" len="med"/>
+                      <a:tailEnd type="none" w="med" len="med"/>
+                    </a:lnR>
+                    <a:lnT w="12700" cap="flat" cmpd="sng" algn="ctr">
+                      <a:solidFill>
+                        <a:schemeClr val="tx1"/>
+                      </a:solidFill>
+                      <a:prstDash val="solid"/>
+                      <a:round/>
+                      <a:headEnd type="none" w="med" len="med"/>
+                      <a:tailEnd type="none" w="med" len="med"/>
+                    </a:lnT>
+                    <a:lnB w="12700" cap="flat" cmpd="sng" algn="ctr">
+                      <a:solidFill>
+                        <a:schemeClr val="tx1"/>
+                      </a:solidFill>
+                      <a:prstDash val="solid"/>
+                      <a:round/>
+                      <a:headEnd type="none" w="med" len="med"/>
+                      <a:tailEnd type="none" w="med" len="med"/>
+                    </a:lnB>
+                    <a:noFill/>
+                  </a:tcPr>
+                </a:tc>
+                <a:tc>
+                  <a:txBody>
+                    <a:bodyPr/>
+                    <a:lstStyle/>
+                    <a:p>
+                      <a:r>
+                        <a:rPr lang="en-US" sz="1600"/>
+                        <a:t>PHP </a:t>
+                      </a:r>
+                      <a:r>
+                        <a:rPr lang="az-Latn-AZ" sz="1600"/>
+                        <a:t>kodu</a:t>
+                      </a:r>
+                      <a:r>
+                        <a:rPr lang="en-US" sz="1600"/>
+                        <a:t> </a:t>
+                      </a:r>
+                      <a:r>
+                        <a:rPr lang="en-US" sz="1600" b="1"/>
+                        <a:t>deyil</a:t>
+                      </a:r>
+                      <a:r>
+                        <a:rPr lang="en-US" sz="1600"/>
+                        <a:t>, düz mətndir</a:t>
+                      </a:r>
+                    </a:p>
+                  </a:txBody>
+                  <a:tcPr anchor="ctr">
+                    <a:lnL w="12700" cap="flat" cmpd="sng" algn="ctr">
+                      <a:solidFill>
+                        <a:schemeClr val="tx1"/>
+                      </a:solidFill>
+                      <a:prstDash val="solid"/>
+                      <a:round/>
+                      <a:headEnd type="none" w="med" len="med"/>
+                      <a:tailEnd type="none" w="med" len="med"/>
+                    </a:lnL>
+                    <a:lnR w="12700" cap="flat" cmpd="sng" algn="ctr">
+                      <a:solidFill>
+                        <a:schemeClr val="tx1"/>
+                      </a:solidFill>
+                      <a:prstDash val="solid"/>
+                      <a:round/>
+                      <a:headEnd type="none" w="med" len="med"/>
+                      <a:tailEnd type="none" w="med" len="med"/>
+                    </a:lnR>
+                    <a:lnT w="12700" cap="flat" cmpd="sng" algn="ctr">
+                      <a:solidFill>
+                        <a:schemeClr val="tx1"/>
+                      </a:solidFill>
+                      <a:prstDash val="solid"/>
+                      <a:round/>
+                      <a:headEnd type="none" w="med" len="med"/>
+                      <a:tailEnd type="none" w="med" len="med"/>
+                    </a:lnT>
+                    <a:lnB w="12700" cap="flat" cmpd="sng" algn="ctr">
+                      <a:solidFill>
+                        <a:schemeClr val="tx1"/>
+                      </a:solidFill>
+                      <a:prstDash val="solid"/>
+                      <a:round/>
+                      <a:headEnd type="none" w="med" len="med"/>
+                      <a:tailEnd type="none" w="med" len="med"/>
+                    </a:lnB>
+                    <a:noFill/>
+                  </a:tcPr>
+                </a:tc>
+                <a:extLst>
+                  <a:ext uri="{0D108BD9-81ED-4DB2-BD59-A6C34878D82A}">
+                    <a16:rowId xmlns:a16="http://schemas.microsoft.com/office/drawing/2014/main" val="3772426789"/>
+                  </a:ext>
+                </a:extLst>
+              </a:tr>
+            </a:tbl>
+          </a:graphicData>
+        </a:graphic>
+      </p:graphicFrame>
     </p:spTree>
     <p:extLst>
       <p:ext uri="{BB962C8B-B14F-4D97-AF65-F5344CB8AC3E}">
@@ -3521,6 +4623,976 @@
         <p:spPr>
           <a:xfrm>
             <a:off x="217714" y="255046"/>
+            <a:ext cx="11756571" cy="6356997"/>
+          </a:xfrm>
+          <a:prstGeom prst="rect">
+            <a:avLst/>
+          </a:prstGeom>
+          <a:noFill/>
+        </p:spPr>
+        <p:txBody>
+          <a:bodyPr wrap="square">
+            <a:spAutoFit/>
+          </a:bodyPr>
+          <a:lstStyle/>
+          <a:p>
+            <a:pPr>
+              <a:lnSpc>
+                <a:spcPct val="150000"/>
+              </a:lnSpc>
+            </a:pPr>
+            <a:r>
+              <a:rPr kumimoji="0" lang="az-Latn-AZ" altLang="en-US" sz="1300" b="1" i="0" u="none" strike="noStrike" cap="none" normalizeH="0" baseline="0">
+                <a:ln>
+                  <a:noFill/>
+                </a:ln>
+                <a:solidFill>
+                  <a:srgbClr val="FF0000"/>
+                </a:solidFill>
+                <a:effectLst/>
+                <a:latin typeface="Arial" panose="020B0604020202020204" pitchFamily="34" charset="0"/>
+              </a:rPr>
+              <a:t>1) </a:t>
+            </a:r>
+            <a:r>
+              <a:rPr kumimoji="0" lang="en-US" altLang="en-US" sz="1300" b="1" i="0" u="none" strike="noStrike" cap="none" normalizeH="0" baseline="0">
+                <a:ln>
+                  <a:noFill/>
+                </a:ln>
+                <a:solidFill>
+                  <a:srgbClr val="FF0000"/>
+                </a:solidFill>
+                <a:effectLst/>
+                <a:latin typeface="Arial" panose="020B0604020202020204" pitchFamily="34" charset="0"/>
+              </a:rPr>
+              <a:t>@foreach ($posts as $post) </a:t>
+            </a:r>
+            <a:endParaRPr kumimoji="0" lang="az-Latn-AZ" altLang="en-US" sz="1300" b="1" i="0" u="none" strike="noStrike" cap="none" normalizeH="0" baseline="0">
+              <a:ln>
+                <a:noFill/>
+              </a:ln>
+              <a:solidFill>
+                <a:srgbClr val="FF0000"/>
+              </a:solidFill>
+              <a:effectLst/>
+              <a:latin typeface="Arial" panose="020B0604020202020204" pitchFamily="34" charset="0"/>
+            </a:endParaRPr>
+          </a:p>
+          <a:p>
+            <a:pPr>
+              <a:lnSpc>
+                <a:spcPct val="150000"/>
+              </a:lnSpc>
+            </a:pPr>
+            <a:r>
+              <a:rPr kumimoji="0" lang="az-Latn-AZ" altLang="en-US" sz="1300" b="0" i="0" u="none" strike="noStrike" cap="none" normalizeH="0" baseline="0">
+                <a:ln>
+                  <a:noFill/>
+                </a:ln>
+                <a:solidFill>
+                  <a:schemeClr val="tx1"/>
+                </a:solidFill>
+                <a:effectLst/>
+                <a:latin typeface="Arial" panose="020B0604020202020204" pitchFamily="34" charset="0"/>
+              </a:rPr>
+              <a:t>	</a:t>
+            </a:r>
+            <a:r>
+              <a:rPr kumimoji="0" lang="en-US" altLang="en-US" sz="1300" b="1" i="0" u="none" strike="noStrike" cap="none" normalizeH="0" baseline="0">
+                <a:ln>
+                  <a:noFill/>
+                </a:ln>
+                <a:solidFill>
+                  <a:srgbClr val="00B050"/>
+                </a:solidFill>
+                <a:effectLst/>
+                <a:latin typeface="Arial" panose="020B0604020202020204" pitchFamily="34" charset="0"/>
+              </a:rPr>
+              <a:t>&lt;x-post.index </a:t>
+            </a:r>
+            <a:r>
+              <a:rPr kumimoji="0" lang="en-US" altLang="en-US" sz="1300" b="1" i="0" u="none" strike="noStrike" cap="none" normalizeH="0" baseline="0">
+                <a:ln>
+                  <a:noFill/>
+                </a:ln>
+                <a:effectLst/>
+                <a:latin typeface="Arial" panose="020B0604020202020204" pitchFamily="34" charset="0"/>
+              </a:rPr>
+              <a:t>:post="$post" </a:t>
+            </a:r>
+            <a:r>
+              <a:rPr kumimoji="0" lang="en-US" altLang="en-US" sz="1300" b="1" i="0" u="none" strike="noStrike" cap="none" normalizeH="0" baseline="0">
+                <a:ln>
+                  <a:noFill/>
+                </a:ln>
+                <a:solidFill>
+                  <a:srgbClr val="00B050"/>
+                </a:solidFill>
+                <a:effectLst/>
+                <a:latin typeface="Arial" panose="020B0604020202020204" pitchFamily="34" charset="0"/>
+              </a:rPr>
+              <a:t>/&gt; </a:t>
+            </a:r>
+            <a:endParaRPr kumimoji="0" lang="az-Latn-AZ" altLang="en-US" sz="1300" b="1" i="0" u="none" strike="noStrike" cap="none" normalizeH="0" baseline="0">
+              <a:ln>
+                <a:noFill/>
+              </a:ln>
+              <a:solidFill>
+                <a:srgbClr val="00B050"/>
+              </a:solidFill>
+              <a:effectLst/>
+              <a:latin typeface="Arial" panose="020B0604020202020204" pitchFamily="34" charset="0"/>
+            </a:endParaRPr>
+          </a:p>
+          <a:p>
+            <a:pPr>
+              <a:lnSpc>
+                <a:spcPct val="150000"/>
+              </a:lnSpc>
+            </a:pPr>
+            <a:r>
+              <a:rPr lang="az-Latn-AZ" altLang="en-US" sz="1300">
+                <a:latin typeface="Arial" panose="020B0604020202020204" pitchFamily="34" charset="0"/>
+              </a:rPr>
+              <a:t>       </a:t>
+            </a:r>
+            <a:r>
+              <a:rPr kumimoji="0" lang="en-US" altLang="en-US" sz="1300" b="1" i="0" u="none" strike="noStrike" cap="none" normalizeH="0" baseline="0">
+                <a:ln>
+                  <a:noFill/>
+                </a:ln>
+                <a:solidFill>
+                  <a:srgbClr val="FF0000"/>
+                </a:solidFill>
+                <a:effectLst/>
+                <a:latin typeface="Arial" panose="020B0604020202020204" pitchFamily="34" charset="0"/>
+              </a:rPr>
+              <a:t>@endforeach</a:t>
+            </a:r>
+            <a:endParaRPr kumimoji="0" lang="az-Latn-AZ" altLang="en-US" sz="1300" b="1" i="0" u="none" strike="noStrike" cap="none" normalizeH="0" baseline="0">
+              <a:ln>
+                <a:noFill/>
+              </a:ln>
+              <a:solidFill>
+                <a:srgbClr val="FF0000"/>
+              </a:solidFill>
+              <a:effectLst/>
+              <a:latin typeface="Arial" panose="020B0604020202020204" pitchFamily="34" charset="0"/>
+            </a:endParaRPr>
+          </a:p>
+          <a:p>
+            <a:pPr marL="342900" indent="-342900">
+              <a:lnSpc>
+                <a:spcPct val="150000"/>
+              </a:lnSpc>
+              <a:buAutoNum type="arabicParenR"/>
+            </a:pPr>
+            <a:endParaRPr kumimoji="0" lang="en-US" altLang="en-US" sz="1300" b="0" i="0" u="none" strike="noStrike" cap="none" normalizeH="0" baseline="0">
+              <a:ln>
+                <a:noFill/>
+              </a:ln>
+              <a:solidFill>
+                <a:schemeClr val="tx1"/>
+              </a:solidFill>
+              <a:effectLst/>
+              <a:latin typeface="Arial" panose="020B0604020202020204" pitchFamily="34" charset="0"/>
+            </a:endParaRPr>
+          </a:p>
+          <a:p>
+            <a:pPr>
+              <a:lnSpc>
+                <a:spcPct val="150000"/>
+              </a:lnSpc>
+              <a:buNone/>
+            </a:pPr>
+            <a:r>
+              <a:rPr kumimoji="0" lang="en-US" altLang="en-US" sz="1300" b="1" i="0" u="none" strike="noStrike" cap="none" normalizeH="0" baseline="0">
+                <a:ln>
+                  <a:noFill/>
+                </a:ln>
+                <a:solidFill>
+                  <a:schemeClr val="tx1"/>
+                </a:solidFill>
+                <a:effectLst/>
+                <a:latin typeface="Arial" panose="020B0604020202020204" pitchFamily="34" charset="0"/>
+              </a:rPr>
+              <a:t>Bu zaman</a:t>
+            </a:r>
+            <a:r>
+              <a:rPr kumimoji="0" lang="en-US" altLang="en-US" sz="1300" b="0" i="0" u="none" strike="noStrike" cap="none" normalizeH="0" baseline="0">
+                <a:ln>
+                  <a:noFill/>
+                </a:ln>
+                <a:solidFill>
+                  <a:schemeClr val="tx1"/>
+                </a:solidFill>
+                <a:effectLst/>
+                <a:latin typeface="Arial" panose="020B0604020202020204" pitchFamily="34" charset="0"/>
+              </a:rPr>
+              <a:t>:</a:t>
+            </a:r>
+          </a:p>
+          <a:p>
+            <a:pPr marL="742950" lvl="1" indent="-285750">
+              <a:lnSpc>
+                <a:spcPct val="150000"/>
+              </a:lnSpc>
+              <a:buFont typeface="Arial" panose="020B0604020202020204" pitchFamily="34" charset="0"/>
+              <a:buChar char="•"/>
+            </a:pPr>
+            <a:r>
+              <a:rPr kumimoji="0" lang="en-US" altLang="en-US" sz="1300" b="1" i="0" u="none" strike="noStrike" cap="none" normalizeH="0" baseline="0">
+                <a:ln>
+                  <a:noFill/>
+                </a:ln>
+                <a:solidFill>
+                  <a:schemeClr val="tx1"/>
+                </a:solidFill>
+                <a:effectLst/>
+                <a:latin typeface="Arial" panose="020B0604020202020204" pitchFamily="34" charset="0"/>
+              </a:rPr>
+              <a:t>$post </a:t>
+            </a:r>
+            <a:r>
+              <a:rPr kumimoji="0" lang="en-US" altLang="en-US" sz="1300" b="0" i="0" u="none" strike="noStrike" cap="none" normalizeH="0" baseline="0">
+                <a:ln>
+                  <a:noFill/>
+                </a:ln>
+                <a:solidFill>
+                  <a:schemeClr val="tx1"/>
+                </a:solidFill>
+                <a:effectLst/>
+                <a:latin typeface="Arial" panose="020B0604020202020204" pitchFamily="34" charset="0"/>
+              </a:rPr>
+              <a:t>– PHP dəyişənidir (məsələn: Post modeli obyekti)</a:t>
+            </a:r>
+          </a:p>
+          <a:p>
+            <a:pPr marL="742950" lvl="1" indent="-285750">
+              <a:lnSpc>
+                <a:spcPct val="150000"/>
+              </a:lnSpc>
+              <a:buFont typeface="Arial" panose="020B0604020202020204" pitchFamily="34" charset="0"/>
+              <a:buChar char="•"/>
+            </a:pPr>
+            <a:r>
+              <a:rPr kumimoji="0" lang="en-US" altLang="en-US" sz="1300" b="1" i="0" u="none" strike="noStrike" cap="none" normalizeH="0" baseline="0">
+                <a:ln>
+                  <a:noFill/>
+                </a:ln>
+                <a:solidFill>
+                  <a:schemeClr val="tx1"/>
+                </a:solidFill>
+                <a:effectLst/>
+                <a:latin typeface="Arial" panose="020B0604020202020204" pitchFamily="34" charset="0"/>
+              </a:rPr>
+              <a:t>:post="$post"</a:t>
+            </a:r>
+            <a:r>
+              <a:rPr kumimoji="0" lang="en-US" altLang="en-US" sz="1300" b="0" i="0" u="none" strike="noStrike" cap="none" normalizeH="0" baseline="0">
+                <a:ln>
+                  <a:noFill/>
+                </a:ln>
+                <a:solidFill>
+                  <a:schemeClr val="tx1"/>
+                </a:solidFill>
+                <a:effectLst/>
+                <a:latin typeface="Arial" panose="020B0604020202020204" pitchFamily="34" charset="0"/>
+              </a:rPr>
+              <a:t> – deməkdir ki, component-ə dəyişəni verirəm, yəni </a:t>
+            </a:r>
+            <a:r>
+              <a:rPr kumimoji="0" lang="en-US" altLang="en-US" sz="1300" b="1" i="0" u="none" strike="noStrike" cap="none" normalizeH="0" baseline="0">
+                <a:ln>
+                  <a:noFill/>
+                </a:ln>
+                <a:solidFill>
+                  <a:schemeClr val="tx1"/>
+                </a:solidFill>
+                <a:effectLst/>
+                <a:latin typeface="Arial" panose="020B0604020202020204" pitchFamily="34" charset="0"/>
+              </a:rPr>
+              <a:t>Post</a:t>
+            </a:r>
+            <a:r>
+              <a:rPr kumimoji="0" lang="en-US" altLang="en-US" sz="1300" b="0" i="0" u="none" strike="noStrike" cap="none" normalizeH="0" baseline="0">
+                <a:ln>
+                  <a:noFill/>
+                </a:ln>
+                <a:solidFill>
+                  <a:schemeClr val="tx1"/>
+                </a:solidFill>
+                <a:effectLst/>
+                <a:latin typeface="Arial" panose="020B0604020202020204" pitchFamily="34" charset="0"/>
+              </a:rPr>
+              <a:t> obyekti</a:t>
+            </a:r>
+            <a:r>
+              <a:rPr kumimoji="0" lang="az-Latn-AZ" altLang="en-US" sz="1300" b="0" i="0" u="none" strike="noStrike" cap="none" normalizeH="0" baseline="0">
+                <a:ln>
+                  <a:noFill/>
+                </a:ln>
+                <a:solidFill>
+                  <a:schemeClr val="tx1"/>
+                </a:solidFill>
+                <a:effectLst/>
+                <a:latin typeface="Arial" panose="020B0604020202020204" pitchFamily="34" charset="0"/>
+              </a:rPr>
+              <a:t>,</a:t>
+            </a:r>
+            <a:r>
+              <a:rPr kumimoji="0" lang="en-US" altLang="en-US" sz="1300" b="0" i="0" u="none" strike="noStrike" cap="none" normalizeH="0" baseline="0">
+                <a:ln>
+                  <a:noFill/>
+                </a:ln>
+                <a:solidFill>
+                  <a:schemeClr val="tx1"/>
+                </a:solidFill>
+                <a:effectLst/>
+                <a:latin typeface="Arial" panose="020B0604020202020204" pitchFamily="34" charset="0"/>
+              </a:rPr>
+              <a:t> </a:t>
+            </a:r>
+            <a:r>
+              <a:rPr kumimoji="0" lang="en-US" altLang="en-US" sz="1300" b="1" i="0" u="none" strike="noStrike" cap="none" normalizeH="0" baseline="0">
+                <a:ln>
+                  <a:noFill/>
+                </a:ln>
+                <a:solidFill>
+                  <a:schemeClr val="tx1"/>
+                </a:solidFill>
+                <a:effectLst/>
+                <a:latin typeface="Arial" panose="020B0604020202020204" pitchFamily="34" charset="0"/>
+              </a:rPr>
+              <a:t>index</a:t>
+            </a:r>
+            <a:r>
+              <a:rPr kumimoji="0" lang="az-Latn-AZ" altLang="en-US" sz="1300" b="0" i="0" u="none" strike="noStrike" cap="none" normalizeH="0" baseline="0">
+                <a:ln>
+                  <a:noFill/>
+                </a:ln>
+                <a:solidFill>
+                  <a:schemeClr val="tx1"/>
+                </a:solidFill>
+                <a:effectLst/>
+                <a:latin typeface="Arial" panose="020B0604020202020204" pitchFamily="34" charset="0"/>
+              </a:rPr>
+              <a:t> adlı</a:t>
+            </a:r>
+            <a:r>
+              <a:rPr kumimoji="0" lang="en-US" altLang="en-US" sz="1300" b="0" i="0" u="none" strike="noStrike" cap="none" normalizeH="0" baseline="0">
+                <a:ln>
+                  <a:noFill/>
+                </a:ln>
+                <a:solidFill>
+                  <a:schemeClr val="tx1"/>
+                </a:solidFill>
+                <a:effectLst/>
+                <a:latin typeface="Arial" panose="020B0604020202020204" pitchFamily="34" charset="0"/>
+              </a:rPr>
+              <a:t> komponentə ötürülür</a:t>
+            </a:r>
+          </a:p>
+          <a:p>
+            <a:pPr>
+              <a:lnSpc>
+                <a:spcPct val="150000"/>
+              </a:lnSpc>
+              <a:buNone/>
+            </a:pPr>
+            <a:endParaRPr kumimoji="0" lang="en-US" altLang="en-US" sz="1300" b="0" i="0" u="none" strike="noStrike" cap="none" normalizeH="0" baseline="0">
+              <a:ln>
+                <a:noFill/>
+              </a:ln>
+              <a:solidFill>
+                <a:schemeClr val="tx1"/>
+              </a:solidFill>
+              <a:effectLst/>
+              <a:latin typeface="Arial" panose="020B0604020202020204" pitchFamily="34" charset="0"/>
+            </a:endParaRPr>
+          </a:p>
+          <a:p>
+            <a:pPr>
+              <a:lnSpc>
+                <a:spcPct val="150000"/>
+              </a:lnSpc>
+              <a:buNone/>
+            </a:pPr>
+            <a:r>
+              <a:rPr kumimoji="0" lang="en-US" altLang="en-US" sz="1300" b="0" i="0" u="none" strike="noStrike" cap="none" normalizeH="0" baseline="0">
+                <a:ln>
+                  <a:noFill/>
+                </a:ln>
+                <a:solidFill>
+                  <a:schemeClr val="tx1"/>
+                </a:solidFill>
+                <a:effectLst/>
+                <a:latin typeface="Arial" panose="020B0604020202020204" pitchFamily="34" charset="0"/>
+              </a:rPr>
+              <a:t>Laravel burada deyir:</a:t>
+            </a:r>
+            <a:r>
+              <a:rPr lang="az-Latn-AZ" altLang="en-US" sz="1300">
+                <a:latin typeface="Arial" panose="020B0604020202020204" pitchFamily="34" charset="0"/>
+              </a:rPr>
+              <a:t> </a:t>
+            </a:r>
+            <a:r>
+              <a:rPr kumimoji="0" lang="en-US" altLang="en-US" sz="1300" b="0" i="0" u="none" strike="noStrike" cap="none" normalizeH="0" baseline="0">
+                <a:ln>
+                  <a:noFill/>
+                </a:ln>
+                <a:solidFill>
+                  <a:schemeClr val="tx1"/>
+                </a:solidFill>
+                <a:effectLst/>
+                <a:latin typeface="Arial" panose="020B0604020202020204" pitchFamily="34" charset="0"/>
+              </a:rPr>
+              <a:t>“Aha, bu PHP ifadəsidir, və nəticəsini komponentə ötür.”</a:t>
+            </a:r>
+            <a:endParaRPr kumimoji="0" lang="az-Latn-AZ" altLang="en-US" sz="1300" b="0" i="0" u="none" strike="noStrike" cap="none" normalizeH="0" baseline="0">
+              <a:ln>
+                <a:noFill/>
+              </a:ln>
+              <a:solidFill>
+                <a:schemeClr val="tx1"/>
+              </a:solidFill>
+              <a:effectLst/>
+              <a:latin typeface="Arial" panose="020B0604020202020204" pitchFamily="34" charset="0"/>
+            </a:endParaRPr>
+          </a:p>
+          <a:p>
+            <a:pPr>
+              <a:lnSpc>
+                <a:spcPct val="150000"/>
+              </a:lnSpc>
+              <a:buNone/>
+            </a:pPr>
+            <a:endParaRPr lang="az-Latn-AZ" altLang="en-US" sz="1300">
+              <a:latin typeface="Arial" panose="020B0604020202020204" pitchFamily="34" charset="0"/>
+            </a:endParaRPr>
+          </a:p>
+          <a:p>
+            <a:pPr>
+              <a:lnSpc>
+                <a:spcPct val="150000"/>
+              </a:lnSpc>
+              <a:buNone/>
+            </a:pPr>
+            <a:endParaRPr kumimoji="0" lang="az-Latn-AZ" altLang="en-US" sz="1300" b="0" i="0" u="none" strike="noStrike" cap="none" normalizeH="0" baseline="0">
+              <a:ln>
+                <a:noFill/>
+              </a:ln>
+              <a:solidFill>
+                <a:schemeClr val="tx1"/>
+              </a:solidFill>
+              <a:effectLst/>
+              <a:latin typeface="Arial" panose="020B0604020202020204" pitchFamily="34" charset="0"/>
+            </a:endParaRPr>
+          </a:p>
+          <a:p>
+            <a:pPr>
+              <a:lnSpc>
+                <a:spcPct val="150000"/>
+              </a:lnSpc>
+              <a:buNone/>
+            </a:pPr>
+            <a:endParaRPr lang="az-Latn-AZ" altLang="en-US" sz="1300">
+              <a:latin typeface="Arial" panose="020B0604020202020204" pitchFamily="34" charset="0"/>
+            </a:endParaRPr>
+          </a:p>
+          <a:p>
+            <a:pPr>
+              <a:lnSpc>
+                <a:spcPct val="150000"/>
+              </a:lnSpc>
+              <a:buNone/>
+            </a:pPr>
+            <a:endParaRPr kumimoji="0" lang="az-Latn-AZ" altLang="en-US" sz="1300" b="0" i="0" u="none" strike="noStrike" cap="none" normalizeH="0" baseline="0">
+              <a:ln>
+                <a:noFill/>
+              </a:ln>
+              <a:solidFill>
+                <a:schemeClr val="tx1"/>
+              </a:solidFill>
+              <a:effectLst/>
+              <a:latin typeface="Arial" panose="020B0604020202020204" pitchFamily="34" charset="0"/>
+            </a:endParaRPr>
+          </a:p>
+          <a:p>
+            <a:pPr>
+              <a:lnSpc>
+                <a:spcPct val="150000"/>
+              </a:lnSpc>
+              <a:buNone/>
+            </a:pPr>
+            <a:r>
+              <a:rPr kumimoji="0" lang="en-US" altLang="en-US" sz="1300" b="1" i="0" u="none" strike="noStrike" cap="none" normalizeH="0" baseline="0">
+                <a:ln>
+                  <a:noFill/>
+                </a:ln>
+                <a:solidFill>
+                  <a:srgbClr val="FF0000"/>
+                </a:solidFill>
+                <a:effectLst/>
+                <a:latin typeface="Arial" panose="020B0604020202020204" pitchFamily="34" charset="0"/>
+              </a:rPr>
+              <a:t>2) </a:t>
+            </a:r>
+            <a:r>
+              <a:rPr kumimoji="0" lang="en-US" altLang="en-US" sz="1300" b="1" i="0" u="none" strike="noStrike" cap="none" normalizeH="0" baseline="0">
+                <a:ln>
+                  <a:noFill/>
+                </a:ln>
+                <a:solidFill>
+                  <a:srgbClr val="00B050"/>
+                </a:solidFill>
+                <a:effectLst/>
+                <a:latin typeface="Arial" panose="020B0604020202020204" pitchFamily="34" charset="0"/>
+              </a:rPr>
+              <a:t>&lt;x-post.index </a:t>
+            </a:r>
+            <a:r>
+              <a:rPr kumimoji="0" lang="en-US" altLang="en-US" sz="1300" b="1" i="0" u="none" strike="noStrike" cap="none" normalizeH="0" baseline="0">
+                <a:ln>
+                  <a:noFill/>
+                </a:ln>
+                <a:effectLst/>
+                <a:latin typeface="Arial" panose="020B0604020202020204" pitchFamily="34" charset="0"/>
+              </a:rPr>
+              <a:t>post="Burada hər hans;sa bir mətn" </a:t>
+            </a:r>
+            <a:r>
+              <a:rPr kumimoji="0" lang="en-US" altLang="en-US" sz="1300" b="1" i="0" u="none" strike="noStrike" cap="none" normalizeH="0" baseline="0">
+                <a:ln>
+                  <a:noFill/>
+                </a:ln>
+                <a:solidFill>
+                  <a:srgbClr val="00B050"/>
+                </a:solidFill>
+                <a:effectLst/>
+                <a:latin typeface="Arial" panose="020B0604020202020204" pitchFamily="34" charset="0"/>
+              </a:rPr>
+              <a:t>/&gt;</a:t>
+            </a:r>
+            <a:endParaRPr kumimoji="0" lang="az-Latn-AZ" altLang="en-US" sz="1300" b="1" i="0" u="none" strike="noStrike" cap="none" normalizeH="0" baseline="0">
+              <a:ln>
+                <a:noFill/>
+              </a:ln>
+              <a:solidFill>
+                <a:srgbClr val="00B050"/>
+              </a:solidFill>
+              <a:effectLst/>
+              <a:latin typeface="Arial" panose="020B0604020202020204" pitchFamily="34" charset="0"/>
+            </a:endParaRPr>
+          </a:p>
+          <a:p>
+            <a:pPr>
+              <a:lnSpc>
+                <a:spcPct val="150000"/>
+              </a:lnSpc>
+              <a:buNone/>
+            </a:pPr>
+            <a:endParaRPr kumimoji="0" lang="en-US" altLang="en-US" sz="1300" b="0" i="0" u="none" strike="noStrike" cap="none" normalizeH="0" baseline="0">
+              <a:ln>
+                <a:noFill/>
+              </a:ln>
+              <a:solidFill>
+                <a:schemeClr val="tx1"/>
+              </a:solidFill>
+              <a:effectLst/>
+              <a:latin typeface="Arial" panose="020B0604020202020204" pitchFamily="34" charset="0"/>
+            </a:endParaRPr>
+          </a:p>
+          <a:p>
+            <a:pPr>
+              <a:lnSpc>
+                <a:spcPct val="150000"/>
+              </a:lnSpc>
+              <a:buNone/>
+            </a:pPr>
+            <a:r>
+              <a:rPr kumimoji="0" lang="en-US" altLang="en-US" sz="1300" b="1" i="0" u="none" strike="noStrike" cap="none" normalizeH="0" baseline="0">
+                <a:ln>
+                  <a:noFill/>
+                </a:ln>
+                <a:solidFill>
+                  <a:schemeClr val="tx1"/>
+                </a:solidFill>
+                <a:effectLst/>
+                <a:latin typeface="Arial" panose="020B0604020202020204" pitchFamily="34" charset="0"/>
+              </a:rPr>
+              <a:t>Bu zaman</a:t>
+            </a:r>
+            <a:r>
+              <a:rPr kumimoji="0" lang="en-US" altLang="en-US" sz="1300" b="0" i="0" u="none" strike="noStrike" cap="none" normalizeH="0" baseline="0">
+                <a:ln>
+                  <a:noFill/>
+                </a:ln>
+                <a:solidFill>
+                  <a:schemeClr val="tx1"/>
+                </a:solidFill>
+                <a:effectLst/>
+                <a:latin typeface="Arial" panose="020B0604020202020204" pitchFamily="34" charset="0"/>
+              </a:rPr>
+              <a:t>:</a:t>
+            </a:r>
+          </a:p>
+          <a:p>
+            <a:pPr marL="742950" lvl="1" indent="-285750">
+              <a:lnSpc>
+                <a:spcPct val="150000"/>
+              </a:lnSpc>
+              <a:buFont typeface="Arial" panose="020B0604020202020204" pitchFamily="34" charset="0"/>
+              <a:buChar char="•"/>
+            </a:pPr>
+            <a:r>
+              <a:rPr kumimoji="0" lang="en-US" altLang="en-US" sz="1300" b="0" i="0" u="none" strike="noStrike" cap="none" normalizeH="0" baseline="0">
+                <a:ln>
+                  <a:noFill/>
+                </a:ln>
+                <a:solidFill>
+                  <a:schemeClr val="tx1"/>
+                </a:solidFill>
+                <a:effectLst/>
+                <a:latin typeface="Arial" panose="020B0604020202020204" pitchFamily="34" charset="0"/>
+              </a:rPr>
+              <a:t>post attributu string-dir.</a:t>
+            </a:r>
+          </a:p>
+          <a:p>
+            <a:pPr marL="742950" lvl="1" indent="-285750">
+              <a:lnSpc>
+                <a:spcPct val="150000"/>
+              </a:lnSpc>
+              <a:buFont typeface="Arial" panose="020B0604020202020204" pitchFamily="34" charset="0"/>
+              <a:buChar char="•"/>
+            </a:pPr>
+            <a:r>
+              <a:rPr kumimoji="0" lang="en-US" altLang="en-US" sz="1300" b="0" i="0" u="none" strike="noStrike" cap="none" normalizeH="0" baseline="0">
+                <a:ln>
+                  <a:noFill/>
+                </a:ln>
+                <a:solidFill>
+                  <a:schemeClr val="tx1"/>
+                </a:solidFill>
+                <a:effectLst/>
+                <a:latin typeface="Arial" panose="020B0604020202020204" pitchFamily="34" charset="0"/>
+              </a:rPr>
+              <a:t>Yəni Laravel burada deyir:</a:t>
+            </a:r>
+            <a:r>
+              <a:rPr kumimoji="0" lang="az-Latn-AZ" altLang="en-US" sz="1300" b="0" i="0" u="none" strike="noStrike" cap="none" normalizeH="0" baseline="0">
+                <a:ln>
+                  <a:noFill/>
+                </a:ln>
+                <a:solidFill>
+                  <a:schemeClr val="tx1"/>
+                </a:solidFill>
+                <a:effectLst/>
+                <a:latin typeface="Arial" panose="020B0604020202020204" pitchFamily="34" charset="0"/>
+              </a:rPr>
+              <a:t> </a:t>
+            </a:r>
+            <a:r>
+              <a:rPr kumimoji="0" lang="en-US" altLang="en-US" sz="1300" b="0" i="0" u="none" strike="noStrike" cap="none" normalizeH="0" baseline="0">
+                <a:ln>
+                  <a:noFill/>
+                </a:ln>
+                <a:solidFill>
+                  <a:schemeClr val="tx1"/>
+                </a:solidFill>
+                <a:effectLst/>
+                <a:latin typeface="Arial" panose="020B0604020202020204" pitchFamily="34" charset="0"/>
+              </a:rPr>
+              <a:t>“Mənə sadəcə </a:t>
+            </a:r>
+            <a:r>
+              <a:rPr kumimoji="0" lang="en-US" altLang="en-US" sz="1300" b="1" i="0" u="none" strike="noStrike" cap="none" normalizeH="0" baseline="0">
+                <a:ln>
+                  <a:noFill/>
+                </a:ln>
+                <a:solidFill>
+                  <a:schemeClr val="tx1"/>
+                </a:solidFill>
+                <a:effectLst/>
+                <a:latin typeface="Arial" panose="020B0604020202020204" pitchFamily="34" charset="0"/>
+              </a:rPr>
+              <a:t>post</a:t>
+            </a:r>
+            <a:r>
+              <a:rPr kumimoji="0" lang="en-US" altLang="en-US" sz="1300" b="0" i="0" u="none" strike="noStrike" cap="none" normalizeH="0" baseline="0">
+                <a:ln>
+                  <a:noFill/>
+                </a:ln>
+                <a:solidFill>
+                  <a:schemeClr val="tx1"/>
+                </a:solidFill>
+                <a:effectLst/>
+                <a:latin typeface="Arial" panose="020B0604020202020204" pitchFamily="34" charset="0"/>
+              </a:rPr>
+              <a:t> adlı atributda bir mətn verdilər. PHP dəyişən və ya obyekt deyil.”</a:t>
+            </a:r>
+            <a:endParaRPr kumimoji="0" lang="az-Latn-AZ" altLang="en-US" sz="1300" b="0" i="0" u="none" strike="noStrike" cap="none" normalizeH="0" baseline="0">
+              <a:ln>
+                <a:noFill/>
+              </a:ln>
+              <a:solidFill>
+                <a:schemeClr val="tx1"/>
+              </a:solidFill>
+              <a:effectLst/>
+              <a:latin typeface="Arial" panose="020B0604020202020204" pitchFamily="34" charset="0"/>
+            </a:endParaRPr>
+          </a:p>
+          <a:p>
+            <a:pPr marL="742950" lvl="1" indent="-285750">
+              <a:lnSpc>
+                <a:spcPct val="150000"/>
+              </a:lnSpc>
+              <a:buFont typeface="Arial" panose="020B0604020202020204" pitchFamily="34" charset="0"/>
+              <a:buChar char="•"/>
+            </a:pPr>
+            <a:endParaRPr lang="az-Latn-AZ" altLang="en-US" sz="1300">
+              <a:latin typeface="Arial" panose="020B0604020202020204" pitchFamily="34" charset="0"/>
+            </a:endParaRPr>
+          </a:p>
+          <a:p>
+            <a:pPr marL="742950" lvl="1" indent="-285750">
+              <a:lnSpc>
+                <a:spcPct val="150000"/>
+              </a:lnSpc>
+              <a:buFont typeface="Arial" panose="020B0604020202020204" pitchFamily="34" charset="0"/>
+              <a:buChar char="•"/>
+            </a:pPr>
+            <a:endParaRPr kumimoji="0" lang="az-Latn-AZ" altLang="en-US" sz="1300" b="0" i="0" u="none" strike="noStrike" cap="none" normalizeH="0" baseline="0">
+              <a:ln>
+                <a:noFill/>
+              </a:ln>
+              <a:solidFill>
+                <a:schemeClr val="tx1"/>
+              </a:solidFill>
+              <a:effectLst/>
+              <a:latin typeface="Arial" panose="020B0604020202020204" pitchFamily="34" charset="0"/>
+            </a:endParaRPr>
+          </a:p>
+          <a:p>
+            <a:pPr marL="742950" lvl="1" indent="-285750">
+              <a:lnSpc>
+                <a:spcPct val="150000"/>
+              </a:lnSpc>
+              <a:buFont typeface="Wingdings" panose="05000000000000000000" pitchFamily="2" charset="2"/>
+              <a:buChar char="q"/>
+            </a:pPr>
+            <a:r>
+              <a:rPr kumimoji="0" lang="en-US" altLang="en-US" sz="1300" b="1" i="0" u="none" strike="noStrike" cap="none" normalizeH="0" baseline="0">
+                <a:ln>
+                  <a:noFill/>
+                </a:ln>
+                <a:solidFill>
+                  <a:schemeClr val="tx1"/>
+                </a:solidFill>
+                <a:effectLst/>
+                <a:latin typeface="Arial" panose="020B0604020202020204" pitchFamily="34" charset="0"/>
+              </a:rPr>
+              <a:t>Mütləq Qayda</a:t>
+            </a:r>
+            <a:r>
+              <a:rPr kumimoji="0" lang="en-US" altLang="en-US" sz="1300" b="0" i="0" u="none" strike="noStrike" cap="none" normalizeH="0" baseline="0">
+                <a:ln>
+                  <a:noFill/>
+                </a:ln>
+                <a:solidFill>
+                  <a:schemeClr val="tx1"/>
+                </a:solidFill>
+                <a:effectLst/>
+                <a:latin typeface="Arial" panose="020B0604020202020204" pitchFamily="34" charset="0"/>
+              </a:rPr>
+              <a:t>: Əgər </a:t>
+            </a:r>
+            <a:r>
+              <a:rPr kumimoji="0" lang="en-US" altLang="en-US" sz="1300" b="1" i="0" u="none" strike="noStrike" cap="none" normalizeH="0" baseline="0">
+                <a:ln>
+                  <a:noFill/>
+                </a:ln>
+                <a:solidFill>
+                  <a:schemeClr val="tx1"/>
+                </a:solidFill>
+                <a:effectLst/>
+                <a:latin typeface="Arial" panose="020B0604020202020204" pitchFamily="34" charset="0"/>
+              </a:rPr>
+              <a:t>PHP</a:t>
+            </a:r>
+            <a:r>
+              <a:rPr kumimoji="0" lang="en-US" altLang="en-US" sz="1300" b="0" i="0" u="none" strike="noStrike" cap="none" normalizeH="0" baseline="0">
+                <a:ln>
+                  <a:noFill/>
+                </a:ln>
+                <a:solidFill>
+                  <a:schemeClr val="tx1"/>
+                </a:solidFill>
+                <a:effectLst/>
+                <a:latin typeface="Arial" panose="020B0604020202020204" pitchFamily="34" charset="0"/>
+              </a:rPr>
+              <a:t> dəyişəni</a:t>
+            </a:r>
+            <a:r>
+              <a:rPr kumimoji="0" lang="az-Latn-AZ" altLang="en-US" sz="1300" b="0" i="0" u="none" strike="noStrike" cap="none" normalizeH="0" baseline="0">
+                <a:ln>
+                  <a:noFill/>
+                </a:ln>
+                <a:solidFill>
+                  <a:schemeClr val="tx1"/>
+                </a:solidFill>
+                <a:effectLst/>
+                <a:latin typeface="Arial" panose="020B0604020202020204" pitchFamily="34" charset="0"/>
+              </a:rPr>
+              <a:t> olaraq</a:t>
+            </a:r>
+            <a:r>
+              <a:rPr kumimoji="0" lang="en-US" altLang="en-US" sz="1300" b="0" i="0" u="none" strike="noStrike" cap="none" normalizeH="0" baseline="0">
+                <a:ln>
+                  <a:noFill/>
+                </a:ln>
+                <a:solidFill>
+                  <a:schemeClr val="tx1"/>
+                </a:solidFill>
+                <a:effectLst/>
+                <a:latin typeface="Arial" panose="020B0604020202020204" pitchFamily="34" charset="0"/>
+              </a:rPr>
+              <a:t>, </a:t>
+            </a:r>
+            <a:r>
+              <a:rPr kumimoji="0" lang="en-US" altLang="en-US" sz="1300" b="1" i="0" u="none" strike="noStrike" cap="none" normalizeH="0" baseline="0">
+                <a:ln>
+                  <a:noFill/>
+                </a:ln>
+                <a:solidFill>
+                  <a:schemeClr val="tx1"/>
+                </a:solidFill>
+                <a:effectLst/>
+                <a:latin typeface="Arial" panose="020B0604020202020204" pitchFamily="34" charset="0"/>
+              </a:rPr>
+              <a:t>funksiya</a:t>
+            </a:r>
+            <a:r>
+              <a:rPr kumimoji="0" lang="en-US" altLang="en-US" sz="1300" b="0" i="0" u="none" strike="noStrike" cap="none" normalizeH="0" baseline="0">
+                <a:ln>
+                  <a:noFill/>
+                </a:ln>
+                <a:solidFill>
+                  <a:schemeClr val="tx1"/>
+                </a:solidFill>
+                <a:effectLst/>
+                <a:latin typeface="Arial" panose="020B0604020202020204" pitchFamily="34" charset="0"/>
+              </a:rPr>
+              <a:t> və ya </a:t>
+            </a:r>
+            <a:r>
+              <a:rPr kumimoji="0" lang="en-US" altLang="en-US" sz="1300" b="1" i="0" u="none" strike="noStrike" cap="none" normalizeH="0" baseline="0">
+                <a:ln>
+                  <a:noFill/>
+                </a:ln>
+                <a:solidFill>
+                  <a:schemeClr val="tx1"/>
+                </a:solidFill>
+                <a:effectLst/>
+                <a:latin typeface="Arial" panose="020B0604020202020204" pitchFamily="34" charset="0"/>
+              </a:rPr>
+              <a:t>array</a:t>
+            </a:r>
+            <a:r>
+              <a:rPr kumimoji="0" lang="en-US" altLang="en-US" sz="1300" b="0" i="0" u="none" strike="noStrike" cap="none" normalizeH="0" baseline="0">
+                <a:ln>
+                  <a:noFill/>
+                </a:ln>
+                <a:solidFill>
+                  <a:schemeClr val="tx1"/>
+                </a:solidFill>
+                <a:effectLst/>
+                <a:latin typeface="Arial" panose="020B0604020202020204" pitchFamily="34" charset="0"/>
+              </a:rPr>
+              <a:t> göndərirsənsə: </a:t>
+            </a:r>
+            <a:r>
+              <a:rPr kumimoji="0" lang="en-US" altLang="en-US" sz="1300" b="1" i="0" u="none" strike="noStrike" cap="none" normalizeH="0" baseline="0">
+                <a:ln>
+                  <a:noFill/>
+                </a:ln>
+                <a:solidFill>
+                  <a:srgbClr val="FF0000"/>
+                </a:solidFill>
+                <a:effectLst/>
+                <a:latin typeface="Arial" panose="020B0604020202020204" pitchFamily="34" charset="0"/>
+              </a:rPr>
+              <a:t>:</a:t>
+            </a:r>
+            <a:r>
+              <a:rPr kumimoji="0" lang="en-US" altLang="en-US" sz="1300" b="0" i="0" u="none" strike="noStrike" cap="none" normalizeH="0" baseline="0">
+                <a:ln>
+                  <a:noFill/>
+                </a:ln>
+                <a:solidFill>
+                  <a:schemeClr val="tx1"/>
+                </a:solidFill>
+                <a:effectLst/>
+                <a:latin typeface="Arial" panose="020B0604020202020204" pitchFamily="34" charset="0"/>
+              </a:rPr>
+              <a:t> qoy!</a:t>
+            </a:r>
+          </a:p>
+        </p:txBody>
+      </p:sp>
+    </p:spTree>
+    <p:extLst>
+      <p:ext uri="{BB962C8B-B14F-4D97-AF65-F5344CB8AC3E}">
+        <p14:creationId xmlns:p14="http://schemas.microsoft.com/office/powerpoint/2010/main" val="3095838342"/>
+      </p:ext>
+    </p:extLst>
+  </p:cSld>
+  <p:clrMapOvr>
+    <a:masterClrMapping/>
+  </p:clrMapOvr>
+</p:sld>
+</file>
+
+<file path=ppt/slides/slide4.xml><?xml version="1.0" encoding="utf-8"?>
+<p:sld xmlns:a="http://schemas.openxmlformats.org/drawingml/2006/main" xmlns:r="http://schemas.openxmlformats.org/officeDocument/2006/relationships" xmlns:p="http://schemas.openxmlformats.org/presentationml/2006/main">
+  <p:cSld>
+    <p:spTree>
+      <p:nvGrpSpPr>
+        <p:cNvPr id="1" name="">
+          <a:extLst>
+            <a:ext uri="{FF2B5EF4-FFF2-40B4-BE49-F238E27FC236}">
+              <a16:creationId xmlns:a16="http://schemas.microsoft.com/office/drawing/2014/main" id="{0044457E-3A1C-FE17-5048-9039B2C054B5}"/>
+            </a:ext>
+          </a:extLst>
+        </p:cNvPr>
+        <p:cNvGrpSpPr/>
+        <p:nvPr/>
+      </p:nvGrpSpPr>
+      <p:grpSpPr>
+        <a:xfrm>
+          <a:off x="0" y="0"/>
+          <a:ext cx="0" cy="0"/>
+          <a:chOff x="0" y="0"/>
+          <a:chExt cx="0" cy="0"/>
+        </a:xfrm>
+      </p:grpSpPr>
+      <p:sp>
+        <p:nvSpPr>
+          <p:cNvPr id="3" name="TextBox 2">
+            <a:extLst>
+              <a:ext uri="{FF2B5EF4-FFF2-40B4-BE49-F238E27FC236}">
+                <a16:creationId xmlns:a16="http://schemas.microsoft.com/office/drawing/2014/main" id="{2D523D29-776C-17CB-F25F-C4C6972A8456}"/>
+              </a:ext>
+            </a:extLst>
+          </p:cNvPr>
+          <p:cNvSpPr txBox="1"/>
+          <p:nvPr/>
+        </p:nvSpPr>
+        <p:spPr>
+          <a:xfrm>
+            <a:off x="217714" y="255046"/>
             <a:ext cx="11756571" cy="355354"/>
           </a:xfrm>
           <a:prstGeom prst="rect">
@@ -3541,25 +5613,316 @@
               <a:buNone/>
             </a:pPr>
             <a:r>
-              <a:rPr kumimoji="0" lang="en-US" altLang="en-US" sz="1300" b="0" i="0" u="none" strike="noStrike" cap="none" normalizeH="0" baseline="0">
-                <a:ln>
-                  <a:noFill/>
-                </a:ln>
-                <a:solidFill>
-                  <a:schemeClr val="tx1"/>
-                </a:solidFill>
-                <a:effectLst/>
-                <a:latin typeface="Arial" panose="020B0604020202020204" pitchFamily="34" charset="0"/>
-              </a:rPr>
-              <a:t>.</a:t>
-            </a:r>
-          </a:p>
-        </p:txBody>
-      </p:sp>
+              <a:rPr lang="az-Latn-AZ" altLang="en-US" sz="1300">
+                <a:latin typeface="Arial" panose="020B0604020202020204" pitchFamily="34" charset="0"/>
+              </a:rPr>
+              <a:t>Məzmundan asılı olmadan elementlərin hündürlükləri eyni olsun deyə bir balaca modifikasiya edirik class adlarını.</a:t>
+            </a:r>
+            <a:endParaRPr kumimoji="0" lang="en-US" altLang="en-US" sz="1300" b="0" i="0" u="none" strike="noStrike" cap="none" normalizeH="0" baseline="0">
+              <a:ln>
+                <a:noFill/>
+              </a:ln>
+              <a:solidFill>
+                <a:schemeClr val="tx1"/>
+              </a:solidFill>
+              <a:effectLst/>
+              <a:latin typeface="Arial" panose="020B0604020202020204" pitchFamily="34" charset="0"/>
+            </a:endParaRPr>
+          </a:p>
+        </p:txBody>
+      </p:sp>
+      <p:pic>
+        <p:nvPicPr>
+          <p:cNvPr id="4" name="Picture 3">
+            <a:extLst>
+              <a:ext uri="{FF2B5EF4-FFF2-40B4-BE49-F238E27FC236}">
+                <a16:creationId xmlns:a16="http://schemas.microsoft.com/office/drawing/2014/main" id="{30009FA6-14B8-FBF4-CF20-430DCF9DCC8B}"/>
+              </a:ext>
+            </a:extLst>
+          </p:cNvPr>
+          <p:cNvPicPr>
+            <a:picLocks noChangeAspect="1"/>
+          </p:cNvPicPr>
+          <p:nvPr/>
+        </p:nvPicPr>
+        <p:blipFill>
+          <a:blip r:embed="rId2"/>
+          <a:stretch>
+            <a:fillRect/>
+          </a:stretch>
+        </p:blipFill>
+        <p:spPr>
+          <a:xfrm>
+            <a:off x="0" y="2171218"/>
+            <a:ext cx="12192000" cy="2515564"/>
+          </a:xfrm>
+          <a:prstGeom prst="rect">
+            <a:avLst/>
+          </a:prstGeom>
+        </p:spPr>
+      </p:pic>
     </p:spTree>
     <p:extLst>
       <p:ext uri="{BB962C8B-B14F-4D97-AF65-F5344CB8AC3E}">
-        <p14:creationId xmlns:p14="http://schemas.microsoft.com/office/powerpoint/2010/main" val="3095838342"/>
+        <p14:creationId xmlns:p14="http://schemas.microsoft.com/office/powerpoint/2010/main" val="3240994331"/>
+      </p:ext>
+    </p:extLst>
+  </p:cSld>
+  <p:clrMapOvr>
+    <a:masterClrMapping/>
+  </p:clrMapOvr>
+</p:sld>
+</file>
+
+<file path=ppt/slides/slide5.xml><?xml version="1.0" encoding="utf-8"?>
+<p:sld xmlns:a="http://schemas.openxmlformats.org/drawingml/2006/main" xmlns:r="http://schemas.openxmlformats.org/officeDocument/2006/relationships" xmlns:p="http://schemas.openxmlformats.org/presentationml/2006/main">
+  <p:cSld>
+    <p:spTree>
+      <p:nvGrpSpPr>
+        <p:cNvPr id="1" name="">
+          <a:extLst>
+            <a:ext uri="{FF2B5EF4-FFF2-40B4-BE49-F238E27FC236}">
+              <a16:creationId xmlns:a16="http://schemas.microsoft.com/office/drawing/2014/main" id="{0296BF0B-EDF1-8AE1-F1BC-ECADD6640DAF}"/>
+            </a:ext>
+          </a:extLst>
+        </p:cNvPr>
+        <p:cNvGrpSpPr/>
+        <p:nvPr/>
+      </p:nvGrpSpPr>
+      <p:grpSpPr>
+        <a:xfrm>
+          <a:off x="0" y="0"/>
+          <a:ext cx="0" cy="0"/>
+          <a:chOff x="0" y="0"/>
+          <a:chExt cx="0" cy="0"/>
+        </a:xfrm>
+      </p:grpSpPr>
+      <p:sp>
+        <p:nvSpPr>
+          <p:cNvPr id="3" name="TextBox 2">
+            <a:extLst>
+              <a:ext uri="{FF2B5EF4-FFF2-40B4-BE49-F238E27FC236}">
+                <a16:creationId xmlns:a16="http://schemas.microsoft.com/office/drawing/2014/main" id="{3D77B937-81A9-149B-2E6D-0E4B44FE2CE8}"/>
+              </a:ext>
+            </a:extLst>
+          </p:cNvPr>
+          <p:cNvSpPr txBox="1"/>
+          <p:nvPr/>
+        </p:nvSpPr>
+        <p:spPr>
+          <a:xfrm>
+            <a:off x="217714" y="255046"/>
+            <a:ext cx="11756571" cy="355354"/>
+          </a:xfrm>
+          <a:prstGeom prst="rect">
+            <a:avLst/>
+          </a:prstGeom>
+          <a:noFill/>
+        </p:spPr>
+        <p:txBody>
+          <a:bodyPr wrap="square">
+            <a:spAutoFit/>
+          </a:bodyPr>
+          <a:lstStyle/>
+          <a:p>
+            <a:pPr>
+              <a:lnSpc>
+                <a:spcPct val="150000"/>
+              </a:lnSpc>
+              <a:buNone/>
+            </a:pPr>
+            <a:r>
+              <a:rPr kumimoji="0" lang="en-US" altLang="en-US" sz="1300" b="0" i="0" u="none" strike="noStrike" cap="none" normalizeH="0" baseline="0">
+                <a:ln>
+                  <a:noFill/>
+                </a:ln>
+                <a:solidFill>
+                  <a:schemeClr val="tx1"/>
+                </a:solidFill>
+                <a:effectLst/>
+                <a:latin typeface="Arial" panose="020B0604020202020204" pitchFamily="34" charset="0"/>
+              </a:rPr>
+              <a:t>.</a:t>
+            </a:r>
+          </a:p>
+        </p:txBody>
+      </p:sp>
+    </p:spTree>
+    <p:extLst>
+      <p:ext uri="{BB962C8B-B14F-4D97-AF65-F5344CB8AC3E}">
+        <p14:creationId xmlns:p14="http://schemas.microsoft.com/office/powerpoint/2010/main" val="715420926"/>
+      </p:ext>
+    </p:extLst>
+  </p:cSld>
+  <p:clrMapOvr>
+    <a:masterClrMapping/>
+  </p:clrMapOvr>
+</p:sld>
+</file>
+
+<file path=ppt/slides/slide6.xml><?xml version="1.0" encoding="utf-8"?>
+<p:sld xmlns:a="http://schemas.openxmlformats.org/drawingml/2006/main" xmlns:r="http://schemas.openxmlformats.org/officeDocument/2006/relationships" xmlns:p="http://schemas.openxmlformats.org/presentationml/2006/main">
+  <p:cSld>
+    <p:spTree>
+      <p:nvGrpSpPr>
+        <p:cNvPr id="1" name="">
+          <a:extLst>
+            <a:ext uri="{FF2B5EF4-FFF2-40B4-BE49-F238E27FC236}">
+              <a16:creationId xmlns:a16="http://schemas.microsoft.com/office/drawing/2014/main" id="{3F96D2B9-DD11-2002-A583-6E789CD1F3A1}"/>
+            </a:ext>
+          </a:extLst>
+        </p:cNvPr>
+        <p:cNvGrpSpPr/>
+        <p:nvPr/>
+      </p:nvGrpSpPr>
+      <p:grpSpPr>
+        <a:xfrm>
+          <a:off x="0" y="0"/>
+          <a:ext cx="0" cy="0"/>
+          <a:chOff x="0" y="0"/>
+          <a:chExt cx="0" cy="0"/>
+        </a:xfrm>
+      </p:grpSpPr>
+      <p:sp>
+        <p:nvSpPr>
+          <p:cNvPr id="3" name="TextBox 2">
+            <a:extLst>
+              <a:ext uri="{FF2B5EF4-FFF2-40B4-BE49-F238E27FC236}">
+                <a16:creationId xmlns:a16="http://schemas.microsoft.com/office/drawing/2014/main" id="{EE669830-6F6C-EF0F-4344-183FE6BD045A}"/>
+              </a:ext>
+            </a:extLst>
+          </p:cNvPr>
+          <p:cNvSpPr txBox="1"/>
+          <p:nvPr/>
+        </p:nvSpPr>
+        <p:spPr>
+          <a:xfrm>
+            <a:off x="217714" y="255046"/>
+            <a:ext cx="11756571" cy="355354"/>
+          </a:xfrm>
+          <a:prstGeom prst="rect">
+            <a:avLst/>
+          </a:prstGeom>
+          <a:noFill/>
+        </p:spPr>
+        <p:txBody>
+          <a:bodyPr wrap="square">
+            <a:spAutoFit/>
+          </a:bodyPr>
+          <a:lstStyle/>
+          <a:p>
+            <a:pPr>
+              <a:lnSpc>
+                <a:spcPct val="150000"/>
+              </a:lnSpc>
+              <a:buNone/>
+            </a:pPr>
+            <a:r>
+              <a:rPr kumimoji="0" lang="en-US" altLang="en-US" sz="1300" b="0" i="0" u="none" strike="noStrike" cap="none" normalizeH="0" baseline="0">
+                <a:ln>
+                  <a:noFill/>
+                </a:ln>
+                <a:solidFill>
+                  <a:schemeClr val="tx1"/>
+                </a:solidFill>
+                <a:effectLst/>
+                <a:latin typeface="Arial" panose="020B0604020202020204" pitchFamily="34" charset="0"/>
+              </a:rPr>
+              <a:t>.</a:t>
+            </a:r>
+          </a:p>
+        </p:txBody>
+      </p:sp>
+    </p:spTree>
+    <p:extLst>
+      <p:ext uri="{BB962C8B-B14F-4D97-AF65-F5344CB8AC3E}">
+        <p14:creationId xmlns:p14="http://schemas.microsoft.com/office/powerpoint/2010/main" val="2778547046"/>
+      </p:ext>
+    </p:extLst>
+  </p:cSld>
+  <p:clrMapOvr>
+    <a:masterClrMapping/>
+  </p:clrMapOvr>
+</p:sld>
+</file>
+
+<file path=ppt/slides/slide7.xml><?xml version="1.0" encoding="utf-8"?>
+<p:sld xmlns:a="http://schemas.openxmlformats.org/drawingml/2006/main" xmlns:r="http://schemas.openxmlformats.org/officeDocument/2006/relationships" xmlns:p="http://schemas.openxmlformats.org/presentationml/2006/main">
+  <p:cSld>
+    <p:spTree>
+      <p:nvGrpSpPr>
+        <p:cNvPr id="1" name="">
+          <a:extLst>
+            <a:ext uri="{FF2B5EF4-FFF2-40B4-BE49-F238E27FC236}">
+              <a16:creationId xmlns:a16="http://schemas.microsoft.com/office/drawing/2014/main" id="{2DA0552C-D1C0-E1F1-449D-5EECDBE45D39}"/>
+            </a:ext>
+          </a:extLst>
+        </p:cNvPr>
+        <p:cNvGrpSpPr/>
+        <p:nvPr/>
+      </p:nvGrpSpPr>
+      <p:grpSpPr>
+        <a:xfrm>
+          <a:off x="0" y="0"/>
+          <a:ext cx="0" cy="0"/>
+          <a:chOff x="0" y="0"/>
+          <a:chExt cx="0" cy="0"/>
+        </a:xfrm>
+      </p:grpSpPr>
+      <p:sp>
+        <p:nvSpPr>
+          <p:cNvPr id="3" name="TextBox 2">
+            <a:extLst>
+              <a:ext uri="{FF2B5EF4-FFF2-40B4-BE49-F238E27FC236}">
+                <a16:creationId xmlns:a16="http://schemas.microsoft.com/office/drawing/2014/main" id="{28AFBC6A-9A77-3755-10D9-69BEE4BD3E8D}"/>
+              </a:ext>
+            </a:extLst>
+          </p:cNvPr>
+          <p:cNvSpPr txBox="1"/>
+          <p:nvPr/>
+        </p:nvSpPr>
+        <p:spPr>
+          <a:xfrm>
+            <a:off x="217714" y="255046"/>
+            <a:ext cx="11756571" cy="355354"/>
+          </a:xfrm>
+          <a:prstGeom prst="rect">
+            <a:avLst/>
+          </a:prstGeom>
+          <a:noFill/>
+        </p:spPr>
+        <p:txBody>
+          <a:bodyPr wrap="square">
+            <a:spAutoFit/>
+          </a:bodyPr>
+          <a:lstStyle/>
+          <a:p>
+            <a:pPr>
+              <a:lnSpc>
+                <a:spcPct val="150000"/>
+              </a:lnSpc>
+              <a:buNone/>
+            </a:pPr>
+            <a:r>
+              <a:rPr kumimoji="0" lang="en-US" altLang="en-US" sz="1300" b="0" i="0" u="none" strike="noStrike" cap="none" normalizeH="0" baseline="0">
+                <a:ln>
+                  <a:noFill/>
+                </a:ln>
+                <a:solidFill>
+                  <a:schemeClr val="tx1"/>
+                </a:solidFill>
+                <a:effectLst/>
+                <a:latin typeface="Arial" panose="020B0604020202020204" pitchFamily="34" charset="0"/>
+              </a:rPr>
+              <a:t>.</a:t>
+            </a:r>
+          </a:p>
+        </p:txBody>
+      </p:sp>
+    </p:spTree>
+    <p:extLst>
+      <p:ext uri="{BB962C8B-B14F-4D97-AF65-F5344CB8AC3E}">
+        <p14:creationId xmlns:p14="http://schemas.microsoft.com/office/powerpoint/2010/main" val="662181528"/>
       </p:ext>
     </p:extLst>
   </p:cSld>

--- a/.lessons/23 Fundamental Blade Components/3 Passing Data To Components/1.pptx
+++ b/.lessons/23 Fundamental Blade Components/3 Passing Data To Components/1.pptx
@@ -5732,21 +5732,68 @@
               <a:buNone/>
             </a:pPr>
             <a:r>
-              <a:rPr kumimoji="0" lang="en-US" altLang="en-US" sz="1300" b="0" i="0" u="none" strike="noStrike" cap="none" normalizeH="0" baseline="0">
-                <a:ln>
-                  <a:noFill/>
-                </a:ln>
-                <a:solidFill>
-                  <a:schemeClr val="tx1"/>
-                </a:solidFill>
-                <a:effectLst/>
-                <a:latin typeface="Arial" panose="020B0604020202020204" pitchFamily="34" charset="0"/>
-              </a:rPr>
-              <a:t>.</a:t>
-            </a:r>
-          </a:p>
-        </p:txBody>
-      </p:sp>
+              <a:rPr lang="az-Latn-AZ" altLang="en-US" sz="1300">
+                <a:latin typeface="Arial" panose="020B0604020202020204" pitchFamily="34" charset="0"/>
+              </a:rPr>
+              <a:t>Nəticə</a:t>
+            </a:r>
+            <a:endParaRPr kumimoji="0" lang="en-US" altLang="en-US" sz="1300" b="0" i="0" u="none" strike="noStrike" cap="none" normalizeH="0" baseline="0">
+              <a:ln>
+                <a:noFill/>
+              </a:ln>
+              <a:solidFill>
+                <a:schemeClr val="tx1"/>
+              </a:solidFill>
+              <a:effectLst/>
+              <a:latin typeface="Arial" panose="020B0604020202020204" pitchFamily="34" charset="0"/>
+            </a:endParaRPr>
+          </a:p>
+        </p:txBody>
+      </p:sp>
+      <p:pic>
+        <p:nvPicPr>
+          <p:cNvPr id="4" name="Picture 3">
+            <a:extLst>
+              <a:ext uri="{FF2B5EF4-FFF2-40B4-BE49-F238E27FC236}">
+                <a16:creationId xmlns:a16="http://schemas.microsoft.com/office/drawing/2014/main" id="{CDA53A27-B546-DB78-770E-4F15DF66B016}"/>
+              </a:ext>
+            </a:extLst>
+          </p:cNvPr>
+          <p:cNvPicPr>
+            <a:picLocks noChangeAspect="1"/>
+          </p:cNvPicPr>
+          <p:nvPr/>
+        </p:nvPicPr>
+        <p:blipFill>
+          <a:blip r:embed="rId2"/>
+          <a:stretch>
+            <a:fillRect/>
+          </a:stretch>
+        </p:blipFill>
+        <p:spPr>
+          <a:xfrm>
+            <a:off x="5251290" y="0"/>
+            <a:ext cx="6940710" cy="6858000"/>
+          </a:xfrm>
+          <a:prstGeom prst="rect">
+            <a:avLst/>
+          </a:prstGeom>
+          <a:ln w="38100" cap="sq">
+            <a:solidFill>
+              <a:srgbClr val="000000"/>
+            </a:solidFill>
+            <a:prstDash val="solid"/>
+            <a:miter lim="800000"/>
+          </a:ln>
+          <a:effectLst>
+            <a:outerShdw blurRad="50800" dist="38100" dir="2700000" algn="tl" rotWithShape="0">
+              <a:srgbClr val="000000">
+                <a:alpha val="43000"/>
+              </a:srgbClr>
+            </a:outerShdw>
+          </a:effectLst>
+        </p:spPr>
+      </p:pic>
     </p:spTree>
     <p:extLst>
       <p:ext uri="{BB962C8B-B14F-4D97-AF65-F5344CB8AC3E}">
